--- a/presentasi_ace_mobile_agent_v3.pptx
+++ b/presentasi_ace_mobile_agent_v3.pptx
@@ -15,7 +15,6 @@
     <p:sldId id="263" r:id="rId14"/>
     <p:sldId id="264" r:id="rId15"/>
     <p:sldId id="265" r:id="rId16"/>
-    <p:sldId id="266" r:id="rId17"/>
   </p:sldIdLst>
   <p:sldSz cx="12191695" cy="6858000" type="screen4x3"/>
   <p:notesSz cx="6858000" cy="9144000"/>
@@ -3149,8 +3148,8 @@
         </p:nvSpPr>
         <p:spPr>
           <a:xfrm>
-            <a:off x="914400" y="1280160"/>
-            <a:ext cx="1097280" cy="73152"/>
+            <a:off x="914400" y="1188720"/>
+            <a:ext cx="1371600" cy="73152"/>
           </a:xfrm>
           <a:prstGeom prst="rect">
             <a:avLst/>
@@ -3192,8 +3191,8 @@
         </p:nvSpPr>
         <p:spPr>
           <a:xfrm>
-            <a:off x="914400" y="1554480"/>
-            <a:ext cx="10332720" cy="2926080"/>
+            <a:off x="914400" y="1371600"/>
+            <a:ext cx="10332720" cy="3108960"/>
           </a:xfrm>
           <a:prstGeom prst="rect">
             <a:avLst/>
@@ -3229,22 +3228,22 @@
               </a:defRPr>
             </a:pPr>
             <a:r>
-              <a:t>Solusi Multi-Agent Enterprise: Otomasi Layanan Tamu, Perlindungan Pendapatan, &amp; Migrasi State Agen</a:t>
+              <a:t>Otomasi Penanganan Komplain &amp; Operasional Hotel Nusantara Berbasis Mobile Agent</a:t>
             </a:r>
           </a:p>
           <a:p>
             <a:pPr>
               <a:spcBef>
-                <a:spcPts val="1800"/>
+                <a:spcPts val="1600"/>
               </a:spcBef>
-              <a:defRPr sz="1400" b="1">
+              <a:defRPr sz="1300" b="1">
                 <a:solidFill>
                   <a:srgbClr val="FF6B35"/>
                 </a:solidFill>
               </a:defRPr>
             </a:pPr>
             <a:r>
-              <a:t>Mata Kuliah: Agent Enterprise  |  Program Studi Informatika / Sistem Informasi</a:t>
+              <a:t>Mata Kuliah: Agent Enterprise  |  Program Studi Informatika / Sistem Informasi  |  Semester 3</a:t>
             </a:r>
           </a:p>
         </p:txBody>
@@ -3257,8 +3256,8 @@
         </p:nvSpPr>
         <p:spPr>
           <a:xfrm>
-            <a:off x="914400" y="4663440"/>
-            <a:ext cx="10332720" cy="1463040"/>
+            <a:off x="914400" y="4572000"/>
+            <a:ext cx="10332720" cy="1554480"/>
           </a:xfrm>
           <a:prstGeom prst="roundRect">
             <a:avLst/>
@@ -3302,8 +3301,8 @@
         </p:nvSpPr>
         <p:spPr>
           <a:xfrm>
-            <a:off x="1097280" y="4754880"/>
-            <a:ext cx="9966960" cy="1280160"/>
+            <a:off x="1097280" y="4663440"/>
+            <a:ext cx="9966960" cy="1371600"/>
           </a:xfrm>
           <a:prstGeom prst="rect">
             <a:avLst/>
@@ -3311,35 +3310,20 @@
           <a:noFill/>
         </p:spPr>
         <p:txBody>
-          <a:bodyPr wrap="none">
+          <a:bodyPr wrap="square">
             <a:spAutoFit/>
           </a:bodyPr>
           <a:lstStyle/>
           <a:p>
             <a:pPr>
-              <a:defRPr sz="1200" b="1">
-                <a:solidFill>
-                  <a:srgbClr val="FF6B35"/>
-                </a:solidFill>
-              </a:defRPr>
-            </a:pPr>
-            <a:r>
-              <a:t>Disusun oleh: KELOMPOK 5</a:t>
-            </a:r>
-          </a:p>
-          <a:p>
-            <a:pPr>
-              <a:spcBef>
-                <a:spcPts val="800"/>
-              </a:spcBef>
-              <a:defRPr sz="1400">
+              <a:defRPr sz="1300" b="1">
                 <a:solidFill>
                   <a:srgbClr val="FFFFFF"/>
                 </a:solidFill>
               </a:defRPr>
             </a:pPr>
             <a:r>
-              <a:t>• M. Al lail Qadrillah     • Dimas Prabowo     • Monanta Alfiareza     • Frans Alwan</a:t>
+              <a:t>👥 KELOMPOK 5 — TIM PENGEMBANG:</a:t>
             </a:r>
           </a:p>
           <a:p>
@@ -3347,14 +3331,70 @@
               <a:spcBef>
                 <a:spcPts val="600"/>
               </a:spcBef>
-              <a:defRPr sz="1100">
-                <a:solidFill>
-                  <a:srgbClr val="94A3B8"/>
-                </a:solidFill>
-              </a:defRPr>
-            </a:pPr>
-            <a:r>
-              <a:t>Hotel Fiktif: Hotel Nusantara Demo  |  Dual Suite Architecture (Pure Bisnis &amp; Teknikal)</a:t>
+            </a:pPr>
+            <a:r>
+              <a:rPr b="1" sz="1100">
+                <a:solidFill>
+                  <a:srgbClr val="FF6B35"/>
+                </a:solidFill>
+              </a:rPr>
+              <a:t>M. Al lail Qadrillah </a:t>
+            </a:r>
+            <a:r>
+              <a:rPr sz="1000">
+                <a:solidFill>
+                  <a:srgbClr val="CBD5E1"/>
+                </a:solidFill>
+              </a:rPr>
+              <a:t>(Arsitektur Sistem &amp; Lead Developer)   |   </a:t>
+            </a:r>
+            <a:r>
+              <a:rPr b="1" sz="1100">
+                <a:solidFill>
+                  <a:srgbClr val="FF6B35"/>
+                </a:solidFill>
+              </a:rPr>
+              <a:t>Dimas Prabowo </a:t>
+            </a:r>
+            <a:r>
+              <a:rPr sz="1000">
+                <a:solidFill>
+                  <a:srgbClr val="CBD5E1"/>
+                </a:solidFill>
+              </a:rPr>
+              <a:t>(Evaluasi Model ML &amp; Data Pipeline)   |   </a:t>
+            </a:r>
+            <a:r>
+              <a:rPr b="1" sz="1100">
+                <a:solidFill>
+                  <a:srgbClr val="FF6B35"/>
+                </a:solidFill>
+              </a:rPr>
+              <a:t>Monanta Alfiareza </a:t>
+            </a:r>
+            <a:r>
+              <a:rPr sz="1000">
+                <a:solidFill>
+                  <a:srgbClr val="CBD5E1"/>
+                </a:solidFill>
+              </a:rPr>
+              <a:t>(Protokol Migrasi State &amp; Keamanan)   |   </a:t>
+            </a:r>
+            <a:r>
+              <a:rPr b="1" sz="1100">
+                <a:solidFill>
+                  <a:srgbClr val="FF6B35"/>
+                </a:solidFill>
+              </a:rPr>
+              <a:t>Frans Alwan </a:t>
+            </a:r>
+            <a:r>
+              <a:rPr sz="1000">
+                <a:solidFill>
+                  <a:srgbClr val="CBD5E1"/>
+                </a:solidFill>
+              </a:rPr>
+              <a:t>(Antarmuka Pengguna &amp; Integrasi Bisnis)</a:t>
             </a:r>
           </a:p>
         </p:txBody>
@@ -3392,7 +3432,7 @@
             <a:avLst/>
           </a:prstGeom>
           <a:solidFill>
-            <a:srgbClr val="F5F7FA"/>
+            <a:srgbClr val="182235"/>
           </a:solidFill>
           <a:ln>
             <a:noFill/>
@@ -3428,8 +3468,8 @@
         </p:nvSpPr>
         <p:spPr>
           <a:xfrm>
-            <a:off x="731520" y="365760"/>
-            <a:ext cx="10515600" cy="365760"/>
+            <a:off x="1371600" y="1463040"/>
+            <a:ext cx="9418320" cy="4114800"/>
           </a:xfrm>
           <a:prstGeom prst="rect">
             <a:avLst/>
@@ -3443,323 +3483,20 @@
           <a:lstStyle/>
           <a:p>
             <a:pPr>
-              <a:defRPr sz="1100" b="1">
-                <a:solidFill>
-                  <a:srgbClr val="FF6B35"/>
-                </a:solidFill>
-              </a:defRPr>
-            </a:pPr>
-            <a:r>
-              <a:t>VERIFIKASI &amp; PENGUJIAN ILMIAH</a:t>
-            </a:r>
-          </a:p>
-        </p:txBody>
-      </p:sp>
-      <p:sp>
-        <p:nvSpPr>
-          <p:cNvPr id="4" name="TextBox 3"/>
-          <p:cNvSpPr txBox="1"/>
-          <p:nvPr/>
-        </p:nvSpPr>
-        <p:spPr>
-          <a:xfrm>
-            <a:off x="731520" y="640080"/>
-            <a:ext cx="10515600" cy="731520"/>
-          </a:xfrm>
-          <a:prstGeom prst="rect">
-            <a:avLst/>
-          </a:prstGeom>
-          <a:noFill/>
-        </p:spPr>
-        <p:txBody>
-          <a:bodyPr wrap="square">
-            <a:spAutoFit/>
-          </a:bodyPr>
-          <a:lstStyle/>
-          <a:p>
-            <a:pPr>
-              <a:defRPr sz="2400" b="1">
-                <a:solidFill>
-                  <a:srgbClr val="182235"/>
-                </a:solidFill>
-              </a:defRPr>
-            </a:pPr>
-            <a:r>
-              <a:t>Evaluasi &amp; Benchmark: Kesetaraan Hasil Bisnis</a:t>
-            </a:r>
-          </a:p>
-        </p:txBody>
-      </p:sp>
-      <p:sp>
-        <p:nvSpPr>
-          <p:cNvPr id="5" name="Rounded Rectangle 4"/>
-          <p:cNvSpPr/>
-          <p:nvPr/>
-        </p:nvSpPr>
-        <p:spPr>
-          <a:xfrm>
-            <a:off x="731520" y="1645920"/>
-            <a:ext cx="10698480" cy="4389120"/>
-          </a:xfrm>
-          <a:prstGeom prst="roundRect">
-            <a:avLst/>
-          </a:prstGeom>
-          <a:solidFill>
-            <a:srgbClr val="FFFFFF"/>
-          </a:solidFill>
-          <a:ln w="19050">
-            <a:solidFill>
-              <a:srgbClr val="E2E8F0"/>
-            </a:solidFill>
-          </a:ln>
-        </p:spPr>
-        <p:style>
-          <a:lnRef idx="1">
-            <a:schemeClr val="accent1"/>
-          </a:lnRef>
-          <a:fillRef idx="3">
-            <a:schemeClr val="accent1"/>
-          </a:fillRef>
-          <a:effectRef idx="2">
-            <a:schemeClr val="accent1"/>
-          </a:effectRef>
-          <a:fontRef idx="minor">
-            <a:schemeClr val="lt1"/>
-          </a:fontRef>
-        </p:style>
-        <p:txBody>
-          <a:bodyPr rtlCol="0" anchor="ctr"/>
-          <a:lstStyle/>
-          <a:p>
-            <a:pPr algn="ctr"/>
-          </a:p>
-        </p:txBody>
-      </p:sp>
-      <p:sp>
-        <p:nvSpPr>
-          <p:cNvPr id="6" name="TextBox 5"/>
-          <p:cNvSpPr txBox="1"/>
-          <p:nvPr/>
-        </p:nvSpPr>
-        <p:spPr>
-          <a:xfrm>
-            <a:off x="1005840" y="1828800"/>
-            <a:ext cx="10149840" cy="4023360"/>
-          </a:xfrm>
-          <a:prstGeom prst="rect">
-            <a:avLst/>
-          </a:prstGeom>
-          <a:noFill/>
-        </p:spPr>
-        <p:txBody>
-          <a:bodyPr wrap="square">
-            <a:spAutoFit/>
-          </a:bodyPr>
-          <a:lstStyle/>
-          <a:p>
-            <a:pPr>
-              <a:defRPr sz="1800" b="1">
-                <a:solidFill>
-                  <a:srgbClr val="182235"/>
-                </a:solidFill>
-              </a:defRPr>
-            </a:pPr>
-            <a:r>
-              <a:t>📊 Temuan Utama Evaluasi Komparatif (S01 &amp; S02)</a:t>
+              <a:defRPr sz="3000" b="1">
+                <a:solidFill>
+                  <a:srgbClr val="FFFFFF"/>
+                </a:solidFill>
+              </a:defRPr>
+            </a:pPr>
+            <a:r>
+              <a:t>Kesimpulan &amp; Dampak bagi Industri Perhotelan</a:t>
             </a:r>
           </a:p>
           <a:p>
             <a:pPr>
               <a:spcBef>
-                <a:spcPts val="1200"/>
-              </a:spcBef>
-              <a:defRPr sz="1300" b="1">
-                <a:solidFill>
-                  <a:srgbClr val="FF6B35"/>
-                </a:solidFill>
-              </a:defRPr>
-            </a:pPr>
-            <a:r>
-              <a:t>✓ Hasil Bisnis 100% Identik: </a:t>
-            </a:r>
-            <a:r>
-              <a:rPr b="0">
-                <a:solidFill>
-                  <a:srgbClr val="1E293B"/>
-                </a:solidFill>
-              </a:rPr>
-              <a:t>Kedua jalur (Mobile dan Static) menghasilkan keputusan kamar, tarif akhir, dan status tiket yang sama persis karena berbagi kernel evaluasi murni ('evaluate_candidates').</a:t>
-            </a:r>
-          </a:p>
-          <a:p>
-            <a:pPr>
-              <a:spcBef>
-                <a:spcPts val="1200"/>
-              </a:spcBef>
-              <a:defRPr sz="1300" b="1">
-                <a:solidFill>
-                  <a:srgbClr val="FF6B35"/>
-                </a:solidFill>
-              </a:defRPr>
-            </a:pPr>
-            <a:r>
-              <a:t>✓ Efisiensi Payload &amp; Trafik Komunikasi: </a:t>
-            </a:r>
-            <a:r>
-              <a:rPr b="0">
-                <a:solidFill>
-                  <a:srgbClr val="1E293B"/>
-                </a:solidFill>
-              </a:rPr>
-              <a:t>Jalur Mobile Agent mengemas migrasi dalam satu checkpoint kanonik. Tidak ada polling berulang atau penarikan seluruh database reservasi/kamar.</a:t>
-            </a:r>
-          </a:p>
-          <a:p>
-            <a:pPr>
-              <a:spcBef>
-                <a:spcPts val="1200"/>
-              </a:spcBef>
-              <a:defRPr sz="1300" b="1">
-                <a:solidFill>
-                  <a:srgbClr val="FF6B35"/>
-                </a:solidFill>
-              </a:defRPr>
-            </a:pPr>
-            <a:r>
-              <a:t>✓ Keandalan &amp; Kebijakan (Policy vs ML): </a:t>
-            </a:r>
-            <a:r>
-              <a:rPr b="0">
-                <a:solidFill>
-                  <a:srgbClr val="1E293B"/>
-                </a:solidFill>
-              </a:rPr>
-              <a:t>Prediksi Machine Learning (Logistic Regression) dikombinasikan dengan Mandatory Rules. Jika terdeteksi risiko tinggi/sengketa/permintaan staf, aturan bisnis selalu mengesampingkan ML.</a:t>
-            </a:r>
-          </a:p>
-          <a:p>
-            <a:pPr>
-              <a:spcBef>
-                <a:spcPts val="1200"/>
-              </a:spcBef>
-              <a:defRPr sz="1300" b="1">
-                <a:solidFill>
-                  <a:srgbClr val="FF6B35"/>
-                </a:solidFill>
-              </a:defRPr>
-            </a:pPr>
-            <a:r>
-              <a:t>✓ Pengujian Otomatis Menyeluruh: </a:t>
-            </a:r>
-            <a:r>
-              <a:rPr b="0">
-                <a:solidFill>
-                  <a:srgbClr val="1E293B"/>
-                </a:solidFill>
-              </a:rPr>
-              <a:t>Seluruh 68 automated unit &amp; integration tests lulus (100% pass) dalam waktu &lt; 4 detik secara deterministik dan offline.</a:t>
-            </a:r>
-          </a:p>
-        </p:txBody>
-      </p:sp>
-    </p:spTree>
-  </p:cSld>
-  <p:clrMapOvr>
-    <a:masterClrMapping/>
-  </p:clrMapOvr>
-</p:sld>
-</file>
-
-<file path=ppt/slides/slide11.xml><?xml version="1.0" encoding="utf-8"?>
-<p:sld xmlns:a="http://schemas.openxmlformats.org/drawingml/2006/main" xmlns:p="http://schemas.openxmlformats.org/presentationml/2006/main" xmlns:r="http://schemas.openxmlformats.org/officeDocument/2006/relationships">
-  <p:cSld>
-    <p:spTree>
-      <p:nvGrpSpPr>
-        <p:cNvPr id="1" name=""/>
-        <p:cNvGrpSpPr/>
-        <p:nvPr/>
-      </p:nvGrpSpPr>
-      <p:grpSpPr/>
-      <p:sp>
-        <p:nvSpPr>
-          <p:cNvPr id="2" name="Rectangle 1"/>
-          <p:cNvSpPr/>
-          <p:nvPr/>
-        </p:nvSpPr>
-        <p:spPr>
-          <a:xfrm>
-            <a:off x="0" y="0"/>
-            <a:ext cx="12191695" cy="6858000"/>
-          </a:xfrm>
-          <a:prstGeom prst="rect">
-            <a:avLst/>
-          </a:prstGeom>
-          <a:solidFill>
-            <a:srgbClr val="182235"/>
-          </a:solidFill>
-          <a:ln>
-            <a:noFill/>
-          </a:ln>
-        </p:spPr>
-        <p:style>
-          <a:lnRef idx="1">
-            <a:schemeClr val="accent1"/>
-          </a:lnRef>
-          <a:fillRef idx="3">
-            <a:schemeClr val="accent1"/>
-          </a:fillRef>
-          <a:effectRef idx="2">
-            <a:schemeClr val="accent1"/>
-          </a:effectRef>
-          <a:fontRef idx="minor">
-            <a:schemeClr val="lt1"/>
-          </a:fontRef>
-        </p:style>
-        <p:txBody>
-          <a:bodyPr rtlCol="0" anchor="ctr"/>
-          <a:lstStyle/>
-          <a:p>
-            <a:pPr algn="ctr"/>
-          </a:p>
-        </p:txBody>
-      </p:sp>
-      <p:sp>
-        <p:nvSpPr>
-          <p:cNvPr id="3" name="TextBox 2"/>
-          <p:cNvSpPr txBox="1"/>
-          <p:nvPr/>
-        </p:nvSpPr>
-        <p:spPr>
-          <a:xfrm>
-            <a:off x="1371600" y="1645920"/>
-            <a:ext cx="9418320" cy="3657600"/>
-          </a:xfrm>
-          <a:prstGeom prst="rect">
-            <a:avLst/>
-          </a:prstGeom>
-          <a:noFill/>
-        </p:spPr>
-        <p:txBody>
-          <a:bodyPr wrap="square">
-            <a:spAutoFit/>
-          </a:bodyPr>
-          <a:lstStyle/>
-          <a:p>
-            <a:pPr>
-              <a:defRPr sz="3200" b="1">
-                <a:solidFill>
-                  <a:srgbClr val="FFFFFF"/>
-                </a:solidFill>
-              </a:defRPr>
-            </a:pPr>
-            <a:r>
-              <a:t>Kesimpulan &amp; Nilai Tambah Enterprise</a:t>
-            </a:r>
-          </a:p>
-          <a:p>
-            <a:pPr>
-              <a:spcBef>
-                <a:spcPts val="1200"/>
+                <a:spcPts val="1400"/>
               </a:spcBef>
               <a:defRPr sz="1500">
                 <a:solidFill>
@@ -3768,13 +3505,13 @@
               </a:defRPr>
             </a:pPr>
             <a:r>
-              <a:t>• Membuktikan kelayakan implementasi konsep Mobile Agent pada domain operasional perhotelan.</a:t>
+              <a:t>• Membuktikan kelayakan paradigma Mobile Agent dalam menyelesaikan komplain kamar hotel dalam hitungan detik.</a:t>
             </a:r>
           </a:p>
           <a:p>
             <a:pPr>
               <a:spcBef>
-                <a:spcPts val="1200"/>
+                <a:spcPts val="1400"/>
               </a:spcBef>
               <a:defRPr sz="1500">
                 <a:solidFill>
@@ -3783,13 +3520,13 @@
               </a:defRPr>
             </a:pPr>
             <a:r>
-              <a:t>• Mengurangi waktu penanganan keluhan tamu dari 30-45 menit menjadi &lt; 1 menit secara otonom.</a:t>
+              <a:t>• Mencegah 'Double Complaint' dengan memverifikasi kesiapan fisik kamar secara lokal langsung di database operasional.</a:t>
             </a:r>
           </a:p>
           <a:p>
             <a:pPr>
               <a:spcBef>
-                <a:spcPts val="1200"/>
+                <a:spcPts val="1400"/>
               </a:spcBef>
               <a:defRPr sz="1500">
                 <a:solidFill>
@@ -3798,13 +3535,13 @@
               </a:defRPr>
             </a:pPr>
             <a:r>
-              <a:t>• Mencegah kebocoran pendapatan dengan jaminan aturan bisnis mutlak (Policy Guardrails).</a:t>
+              <a:t>• Menjamin perlindungan pendapatan hotel dari kompensasi liar melalui Policy Guardrail yang kokoh.</a:t>
             </a:r>
           </a:p>
           <a:p>
             <a:pPr>
               <a:spcBef>
-                <a:spcPts val="1200"/>
+                <a:spcPts val="1400"/>
               </a:spcBef>
               <a:defRPr sz="1500">
                 <a:solidFill>
@@ -3813,28 +3550,13 @@
               </a:defRPr>
             </a:pPr>
             <a:r>
-              <a:t>• Menyediakan pemisahan antarmuka yang bersih antara Mode Pure Bisnis dan Mode Teknikal.</a:t>
+              <a:t>• Menyediakan antarmuka intuitif bagi 3 pemangku kepentingan: Tamu Hotel, Staf Operasional, dan Tim Manajemen/IT.</a:t>
             </a:r>
           </a:p>
           <a:p>
             <a:pPr>
               <a:spcBef>
-                <a:spcPts val="1200"/>
-              </a:spcBef>
-              <a:defRPr sz="1500">
-                <a:solidFill>
-                  <a:srgbClr val="E2E8F0"/>
-                </a:solidFill>
-              </a:defRPr>
-            </a:pPr>
-            <a:r>
-              <a:t>• Sistem siap didemonstrasikan secara langsung (live interactive demo) maupun otomatis (1-click).</a:t>
-            </a:r>
-          </a:p>
-          <a:p>
-            <a:pPr>
-              <a:spcBef>
-                <a:spcPts val="2400"/>
+                <a:spcPts val="2600"/>
               </a:spcBef>
               <a:defRPr sz="2000" b="1">
                 <a:solidFill>
@@ -3918,7 +3640,7 @@
         <p:spPr>
           <a:xfrm>
             <a:off x="731520" y="365760"/>
-            <a:ext cx="10515600" cy="365760"/>
+            <a:ext cx="10515600" cy="320040"/>
           </a:xfrm>
           <a:prstGeom prst="rect">
             <a:avLst/>
@@ -3939,7 +3661,7 @@
               </a:defRPr>
             </a:pPr>
             <a:r>
-              <a:t>PERSPEKTIF BISNIS &amp; OPERASIONAL</a:t>
+              <a:t>ACE - INTELLIGENT MOBILE AGENT SYSTEM</a:t>
             </a:r>
           </a:p>
         </p:txBody>
@@ -3974,7 +3696,7 @@
               </a:defRPr>
             </a:pPr>
             <a:r>
-              <a:t>Sisi Bisnis: Masalah Nyata di Operasional Hotel Tradisional</a:t>
+              <a:t>Tantangan Nyata Operasional Hotel Tradisional</a:t>
             </a:r>
           </a:p>
         </p:txBody>
@@ -3988,7 +3710,7 @@
         <p:spPr>
           <a:xfrm>
             <a:off x="731520" y="1645920"/>
-            <a:ext cx="5120640" cy="2011680"/>
+            <a:ext cx="3383280" cy="4480560"/>
           </a:xfrm>
           <a:prstGeom prst="roundRect">
             <a:avLst/>
@@ -4032,8 +3754,8 @@
         </p:nvSpPr>
         <p:spPr>
           <a:xfrm>
-            <a:off x="914400" y="1783080"/>
-            <a:ext cx="4754880" cy="1737360"/>
+            <a:off x="914400" y="1828800"/>
+            <a:ext cx="3017520" cy="4114800"/>
           </a:xfrm>
           <a:prstGeom prst="rect">
             <a:avLst/>
@@ -4047,20 +3769,20 @@
           <a:lstStyle/>
           <a:p>
             <a:pPr>
-              <a:defRPr sz="1500" b="1">
+              <a:defRPr sz="1600" b="1">
                 <a:solidFill>
                   <a:srgbClr val="182235"/>
                 </a:solidFill>
               </a:defRPr>
             </a:pPr>
             <a:r>
-              <a:t>⏳ Gesekan Koordinasi (Time Friction)</a:t>
+              <a:t>📞 Koordinasi Lambat &amp; Silo Data</a:t>
             </a:r>
           </a:p>
           <a:p>
             <a:pPr>
               <a:spcBef>
-                <a:spcPts val="800"/>
+                <a:spcPts val="1200"/>
               </a:spcBef>
               <a:defRPr sz="1200">
                 <a:solidFill>
@@ -4069,7 +3791,37 @@
               </a:defRPr>
             </a:pPr>
             <a:r>
-              <a:t>Ketika AC rusak di malam hari, tamu harus menunggu 30-45 menit karena Front Desk harus koordinasi manual via telepon ke tim Housekeeping &amp; Engineering yang sedang di lapangan.</a:t>
+              <a:t>Front Office dan Housekeeping bekerja terpisah. Koordinasi keluhan tamu via telepon manual memakan waktu rata-rata 35-45 menit.</a:t>
+            </a:r>
+          </a:p>
+          <a:p>
+            <a:pPr>
+              <a:spcBef>
+                <a:spcPts val="1600"/>
+              </a:spcBef>
+              <a:defRPr sz="1100" b="1">
+                <a:solidFill>
+                  <a:srgbClr val="FF6B35"/>
+                </a:solidFill>
+              </a:defRPr>
+            </a:pPr>
+            <a:r>
+              <a:t>Dampak Kerugian:</a:t>
+            </a:r>
+          </a:p>
+          <a:p>
+            <a:pPr>
+              <a:spcBef>
+                <a:spcPts val="200"/>
+              </a:spcBef>
+              <a:defRPr sz="1100">
+                <a:solidFill>
+                  <a:srgbClr val="64748B"/>
+                </a:solidFill>
+              </a:defRPr>
+            </a:pPr>
+            <a:r>
+              <a:t>Beban telepon meja depan tinggi &amp; tamu menunggu di kamar yang rusak.</a:t>
             </a:r>
           </a:p>
         </p:txBody>
@@ -4082,198 +3834,8 @@
         </p:nvSpPr>
         <p:spPr>
           <a:xfrm>
-            <a:off x="6217920" y="1645920"/>
-            <a:ext cx="5120640" cy="2011680"/>
-          </a:xfrm>
-          <a:prstGeom prst="roundRect">
-            <a:avLst/>
-          </a:prstGeom>
-          <a:solidFill>
-            <a:srgbClr val="FFFFFF"/>
-          </a:solidFill>
-          <a:ln w="19050">
-            <a:solidFill>
-              <a:srgbClr val="EF4444"/>
-            </a:solidFill>
-          </a:ln>
-        </p:spPr>
-        <p:style>
-          <a:lnRef idx="1">
-            <a:schemeClr val="accent1"/>
-          </a:lnRef>
-          <a:fillRef idx="3">
-            <a:schemeClr val="accent1"/>
-          </a:fillRef>
-          <a:effectRef idx="2">
-            <a:schemeClr val="accent1"/>
-          </a:effectRef>
-          <a:fontRef idx="minor">
-            <a:schemeClr val="lt1"/>
-          </a:fontRef>
-        </p:style>
-        <p:txBody>
-          <a:bodyPr rtlCol="0" anchor="ctr"/>
-          <a:lstStyle/>
-          <a:p>
-            <a:pPr algn="ctr"/>
-          </a:p>
-        </p:txBody>
-      </p:sp>
-      <p:sp>
-        <p:nvSpPr>
-          <p:cNvPr id="8" name="TextBox 7"/>
-          <p:cNvSpPr txBox="1"/>
-          <p:nvPr/>
-        </p:nvSpPr>
-        <p:spPr>
-          <a:xfrm>
-            <a:off x="6400800" y="1783080"/>
-            <a:ext cx="4754880" cy="1737360"/>
-          </a:xfrm>
-          <a:prstGeom prst="rect">
-            <a:avLst/>
-          </a:prstGeom>
-          <a:noFill/>
-        </p:spPr>
-        <p:txBody>
-          <a:bodyPr wrap="square">
-            <a:spAutoFit/>
-          </a:bodyPr>
-          <a:lstStyle/>
-          <a:p>
-            <a:pPr>
-              <a:defRPr sz="1500" b="1">
-                <a:solidFill>
-                  <a:srgbClr val="182235"/>
-                </a:solidFill>
-              </a:defRPr>
-            </a:pPr>
-            <a:r>
-              <a:t>💥 Risiko Kamar Kotor (Double Complaint)</a:t>
-            </a:r>
-          </a:p>
-          <a:p>
-            <a:pPr>
-              <a:spcBef>
-                <a:spcPts val="800"/>
-              </a:spcBef>
-              <a:defRPr sz="1200">
-                <a:solidFill>
-                  <a:srgbClr val="1E293B"/>
-                </a:solidFill>
-              </a:defRPr>
-            </a:pPr>
-            <a:r>
-              <a:t>Resepsionis memindahkan tamu ke kamar kosong di sistem komputer tanpa tahu kamar tersebut belum dibersihkan (DIRTY). Tamu masuk ke kamar berantakan dan komplain dua kali!</a:t>
-            </a:r>
-          </a:p>
-        </p:txBody>
-      </p:sp>
-      <p:sp>
-        <p:nvSpPr>
-          <p:cNvPr id="9" name="Rounded Rectangle 8"/>
-          <p:cNvSpPr/>
-          <p:nvPr/>
-        </p:nvSpPr>
-        <p:spPr>
-          <a:xfrm>
-            <a:off x="731520" y="3931920"/>
-            <a:ext cx="5120640" cy="2011680"/>
-          </a:xfrm>
-          <a:prstGeom prst="roundRect">
-            <a:avLst/>
-          </a:prstGeom>
-          <a:solidFill>
-            <a:srgbClr val="FFFFFF"/>
-          </a:solidFill>
-          <a:ln w="19050">
-            <a:solidFill>
-              <a:srgbClr val="EF4444"/>
-            </a:solidFill>
-          </a:ln>
-        </p:spPr>
-        <p:style>
-          <a:lnRef idx="1">
-            <a:schemeClr val="accent1"/>
-          </a:lnRef>
-          <a:fillRef idx="3">
-            <a:schemeClr val="accent1"/>
-          </a:fillRef>
-          <a:effectRef idx="2">
-            <a:schemeClr val="accent1"/>
-          </a:effectRef>
-          <a:fontRef idx="minor">
-            <a:schemeClr val="lt1"/>
-          </a:fontRef>
-        </p:style>
-        <p:txBody>
-          <a:bodyPr rtlCol="0" anchor="ctr"/>
-          <a:lstStyle/>
-          <a:p>
-            <a:pPr algn="ctr"/>
-          </a:p>
-        </p:txBody>
-      </p:sp>
-      <p:sp>
-        <p:nvSpPr>
-          <p:cNvPr id="10" name="TextBox 9"/>
-          <p:cNvSpPr txBox="1"/>
-          <p:nvPr/>
-        </p:nvSpPr>
-        <p:spPr>
-          <a:xfrm>
-            <a:off x="914400" y="4069080"/>
-            <a:ext cx="4754880" cy="1737360"/>
-          </a:xfrm>
-          <a:prstGeom prst="rect">
-            <a:avLst/>
-          </a:prstGeom>
-          <a:noFill/>
-        </p:spPr>
-        <p:txBody>
-          <a:bodyPr wrap="square">
-            <a:spAutoFit/>
-          </a:bodyPr>
-          <a:lstStyle/>
-          <a:p>
-            <a:pPr>
-              <a:defRPr sz="1500" b="1">
-                <a:solidFill>
-                  <a:srgbClr val="182235"/>
-                </a:solidFill>
-              </a:defRPr>
-            </a:pPr>
-            <a:r>
-              <a:t>💸 Kebocoran Pendapatan (Revenue Leakage)</a:t>
-            </a:r>
-          </a:p>
-          <a:p>
-            <a:pPr>
-              <a:spcBef>
-                <a:spcPts val="800"/>
-              </a:spcBef>
-              <a:defRPr sz="1200">
-                <a:solidFill>
-                  <a:srgbClr val="1E293B"/>
-                </a:solidFill>
-              </a:defRPr>
-            </a:pPr>
-            <a:r>
-              <a:t>Karena panik menghadapi tamu yang marah di tengah malam, staf Front Office sering memberikan upgrade gratis ke kamar Deluxe/Suite tanpa otorisasi manajer.</a:t>
-            </a:r>
-          </a:p>
-        </p:txBody>
-      </p:sp>
-      <p:sp>
-        <p:nvSpPr>
-          <p:cNvPr id="11" name="Rounded Rectangle 10"/>
-          <p:cNvSpPr/>
-          <p:nvPr/>
-        </p:nvSpPr>
-        <p:spPr>
-          <a:xfrm>
-            <a:off x="6217920" y="3931920"/>
-            <a:ext cx="5120640" cy="2011680"/>
+            <a:off x="4389120" y="1645920"/>
+            <a:ext cx="3383280" cy="4480560"/>
           </a:xfrm>
           <a:prstGeom prst="roundRect">
             <a:avLst/>
@@ -4311,14 +3873,14 @@
       </p:sp>
       <p:sp>
         <p:nvSpPr>
-          <p:cNvPr id="12" name="TextBox 11"/>
+          <p:cNvPr id="8" name="TextBox 7"/>
           <p:cNvSpPr txBox="1"/>
           <p:nvPr/>
         </p:nvSpPr>
         <p:spPr>
           <a:xfrm>
-            <a:off x="6400800" y="4069080"/>
-            <a:ext cx="4754880" cy="1737360"/>
+            <a:off x="4572000" y="1828800"/>
+            <a:ext cx="3017520" cy="4114800"/>
           </a:xfrm>
           <a:prstGeom prst="rect">
             <a:avLst/>
@@ -4332,20 +3894,20 @@
           <a:lstStyle/>
           <a:p>
             <a:pPr>
-              <a:defRPr sz="1500" b="1">
+              <a:defRPr sz="1600" b="1">
                 <a:solidFill>
                   <a:srgbClr val="182235"/>
                 </a:solidFill>
               </a:defRPr>
             </a:pPr>
             <a:r>
-              <a:t>📉 Kerusakan Reputasi (Online Reviews)</a:t>
+              <a:t>🧹 Risiko Kamar Kotor (Double Complaint)</a:t>
             </a:r>
           </a:p>
           <a:p>
             <a:pPr>
               <a:spcBef>
-                <a:spcPts val="800"/>
+                <a:spcPts val="1200"/>
               </a:spcBef>
               <a:defRPr sz="1200">
                 <a:solidFill>
@@ -4354,7 +3916,162 @@
               </a:defRPr>
             </a:pPr>
             <a:r>
-              <a:t>Keterlambatan penanganan keluhan kamar berujung ulasan bintang 1 di Google Maps &amp; TripAdvisor, menurunkan angka okupansi dan tingkat pemesanan ulang (guest retention).</a:t>
+              <a:t>Resepsionis memindahkan tamu ke kamar kosong di sistem tanpa verifikasi fisik kesiapan kamar. Tamu mendapati kamar baru belum dibersihkan!</a:t>
+            </a:r>
+          </a:p>
+          <a:p>
+            <a:pPr>
+              <a:spcBef>
+                <a:spcPts val="1600"/>
+              </a:spcBef>
+              <a:defRPr sz="1100" b="1">
+                <a:solidFill>
+                  <a:srgbClr val="FF6B35"/>
+                </a:solidFill>
+              </a:defRPr>
+            </a:pPr>
+            <a:r>
+              <a:t>Dampak Kerugian:</a:t>
+            </a:r>
+          </a:p>
+          <a:p>
+            <a:pPr>
+              <a:spcBef>
+                <a:spcPts val="200"/>
+              </a:spcBef>
+              <a:defRPr sz="1100">
+                <a:solidFill>
+                  <a:srgbClr val="64748B"/>
+                </a:solidFill>
+              </a:defRPr>
+            </a:pPr>
+            <a:r>
+              <a:t>Keluhan berulang dan ulasan bintang 1 di platform online.</a:t>
+            </a:r>
+          </a:p>
+        </p:txBody>
+      </p:sp>
+      <p:sp>
+        <p:nvSpPr>
+          <p:cNvPr id="9" name="Rounded Rectangle 8"/>
+          <p:cNvSpPr/>
+          <p:nvPr/>
+        </p:nvSpPr>
+        <p:spPr>
+          <a:xfrm>
+            <a:off x="8046720" y="1645920"/>
+            <a:ext cx="3383280" cy="4480560"/>
+          </a:xfrm>
+          <a:prstGeom prst="roundRect">
+            <a:avLst/>
+          </a:prstGeom>
+          <a:solidFill>
+            <a:srgbClr val="FFFFFF"/>
+          </a:solidFill>
+          <a:ln w="19050">
+            <a:solidFill>
+              <a:srgbClr val="E2E8F0"/>
+            </a:solidFill>
+          </a:ln>
+        </p:spPr>
+        <p:style>
+          <a:lnRef idx="1">
+            <a:schemeClr val="accent1"/>
+          </a:lnRef>
+          <a:fillRef idx="3">
+            <a:schemeClr val="accent1"/>
+          </a:fillRef>
+          <a:effectRef idx="2">
+            <a:schemeClr val="accent1"/>
+          </a:effectRef>
+          <a:fontRef idx="minor">
+            <a:schemeClr val="lt1"/>
+          </a:fontRef>
+        </p:style>
+        <p:txBody>
+          <a:bodyPr rtlCol="0" anchor="ctr"/>
+          <a:lstStyle/>
+          <a:p>
+            <a:pPr algn="ctr"/>
+          </a:p>
+        </p:txBody>
+      </p:sp>
+      <p:sp>
+        <p:nvSpPr>
+          <p:cNvPr id="10" name="TextBox 9"/>
+          <p:cNvSpPr txBox="1"/>
+          <p:nvPr/>
+        </p:nvSpPr>
+        <p:spPr>
+          <a:xfrm>
+            <a:off x="8229600" y="1828800"/>
+            <a:ext cx="3017520" cy="4114800"/>
+          </a:xfrm>
+          <a:prstGeom prst="rect">
+            <a:avLst/>
+          </a:prstGeom>
+          <a:noFill/>
+        </p:spPr>
+        <p:txBody>
+          <a:bodyPr wrap="square">
+            <a:spAutoFit/>
+          </a:bodyPr>
+          <a:lstStyle/>
+          <a:p>
+            <a:pPr>
+              <a:defRPr sz="1600" b="1">
+                <a:solidFill>
+                  <a:srgbClr val="182235"/>
+                </a:solidFill>
+              </a:defRPr>
+            </a:pPr>
+            <a:r>
+              <a:t>💸 Kebocoran Finansial (Upgrade Liar)</a:t>
+            </a:r>
+          </a:p>
+          <a:p>
+            <a:pPr>
+              <a:spcBef>
+                <a:spcPts val="1200"/>
+              </a:spcBef>
+              <a:defRPr sz="1200">
+                <a:solidFill>
+                  <a:srgbClr val="1E293B"/>
+                </a:solidFill>
+              </a:defRPr>
+            </a:pPr>
+            <a:r>
+              <a:t>Staf panik saat komplain tengah malam sering memberikan upgrade gratis ke kamar mewah tanpa wewenang manajer hotel.</a:t>
+            </a:r>
+          </a:p>
+          <a:p>
+            <a:pPr>
+              <a:spcBef>
+                <a:spcPts val="1600"/>
+              </a:spcBef>
+              <a:defRPr sz="1100" b="1">
+                <a:solidFill>
+                  <a:srgbClr val="FF6B35"/>
+                </a:solidFill>
+              </a:defRPr>
+            </a:pPr>
+            <a:r>
+              <a:t>Dampak Kerugian:</a:t>
+            </a:r>
+          </a:p>
+          <a:p>
+            <a:pPr>
+              <a:spcBef>
+                <a:spcPts val="200"/>
+              </a:spcBef>
+              <a:defRPr sz="1100">
+                <a:solidFill>
+                  <a:srgbClr val="64748B"/>
+                </a:solidFill>
+              </a:defRPr>
+            </a:pPr>
+            <a:r>
+              <a:t>Margin profit hotel tergerus dan pelanggaran SOP berulang.</a:t>
             </a:r>
           </a:p>
         </p:txBody>
@@ -4429,7 +4146,7 @@
         <p:spPr>
           <a:xfrm>
             <a:off x="731520" y="365760"/>
-            <a:ext cx="10515600" cy="365760"/>
+            <a:ext cx="10515600" cy="320040"/>
           </a:xfrm>
           <a:prstGeom prst="rect">
             <a:avLst/>
@@ -4450,7 +4167,7 @@
               </a:defRPr>
             </a:pPr>
             <a:r>
-              <a:t>NILAI TAMBAH ENTERPRISE</a:t>
+              <a:t>ACE - INTELLIGENT MOBILE AGENT SYSTEM</a:t>
             </a:r>
           </a:p>
         </p:txBody>
@@ -4485,7 +4202,7 @@
               </a:defRPr>
             </a:pPr>
             <a:r>
-              <a:t>Business Value &amp; ROI: Dampak Finansial &amp; Kepuasan Tamu</a:t>
+              <a:t>Solusi ACE: Otomasi Cerdas Berbasis Mobile Agent</a:t>
             </a:r>
           </a:p>
         </p:txBody>
@@ -4499,7 +4216,7 @@
         <p:spPr>
           <a:xfrm>
             <a:off x="731520" y="1645920"/>
-            <a:ext cx="5486400" cy="4572000"/>
+            <a:ext cx="3383280" cy="4480560"/>
           </a:xfrm>
           <a:prstGeom prst="roundRect">
             <a:avLst/>
@@ -4509,7 +4226,7 @@
           </a:solidFill>
           <a:ln w="19050">
             <a:solidFill>
-              <a:srgbClr val="E2E8F0"/>
+              <a:srgbClr val="FF6B35"/>
             </a:solidFill>
           </a:ln>
         </p:spPr>
@@ -4544,7 +4261,7 @@
         <p:spPr>
           <a:xfrm>
             <a:off x="914400" y="1828800"/>
-            <a:ext cx="5120640" cy="4206240"/>
+            <a:ext cx="3017520" cy="4114800"/>
           </a:xfrm>
           <a:prstGeom prst="rect">
             <a:avLst/>
@@ -4558,106 +4275,59 @@
           <a:lstStyle/>
           <a:p>
             <a:pPr>
-              <a:defRPr sz="1800" b="1">
-                <a:solidFill>
-                  <a:srgbClr val="182235"/>
-                </a:solidFill>
-              </a:defRPr>
-            </a:pPr>
-            <a:r>
-              <a:t>💎 4 Pilar Nilai Bisnis Sistem ACE</a:t>
+              <a:defRPr sz="1600" b="1">
+                <a:solidFill>
+                  <a:srgbClr val="FF6B35"/>
+                </a:solidFill>
+              </a:defRPr>
+            </a:pPr>
+            <a:r>
+              <a:t>⚡ Resolusi Super Cepat (&lt; 1 Menit)</a:t>
             </a:r>
           </a:p>
           <a:p>
             <a:pPr>
               <a:spcBef>
-                <a:spcPts val="800"/>
+                <a:spcPts val="1400"/>
               </a:spcBef>
-              <a:defRPr sz="1200" b="1">
-                <a:solidFill>
-                  <a:srgbClr val="FF6B35"/>
-                </a:solidFill>
-              </a:defRPr>
-            </a:pPr>
-            <a:r>
-              <a:t>• Resolusi Cepat 80% Kasus Rutin: </a:t>
-            </a:r>
-            <a:r>
-              <a:rPr b="0">
+              <a:defRPr sz="1200">
                 <a:solidFill>
                   <a:srgbClr val="1E293B"/>
                 </a:solidFill>
-              </a:rPr>
-              <a:t>Kasus AC rusak (S01) selesai otomatis dalam &lt; 1 menit. Mobile agent memverifikasi kamar bersih di Operations tanpa perlu telepon manual.</a:t>
+              </a:defRPr>
+            </a:pPr>
+            <a:r>
+              <a:t>Menyelesaikan 80% keluhan kamar rutin secara mandiri dan otomatis tanpa membebani resepsionis telepon.</a:t>
             </a:r>
           </a:p>
           <a:p>
             <a:pPr>
               <a:spcBef>
-                <a:spcPts val="800"/>
+                <a:spcPts val="1800"/>
               </a:spcBef>
-              <a:defRPr sz="1200" b="1">
-                <a:solidFill>
-                  <a:srgbClr val="FF6B35"/>
-                </a:solidFill>
-              </a:defRPr>
-            </a:pPr>
-            <a:r>
-              <a:t>• Proteksi Pendapatan (Revenue Guardrail): </a:t>
-            </a:r>
-            <a:r>
-              <a:rPr b="0">
+              <a:defRPr sz="1100" b="1">
+                <a:solidFill>
+                  <a:srgbClr val="10B981"/>
+                </a:solidFill>
+              </a:defRPr>
+            </a:pPr>
+            <a:r>
+              <a:t>Nilai Tambah Nyata:</a:t>
+            </a:r>
+          </a:p>
+          <a:p>
+            <a:pPr>
+              <a:spcBef>
+                <a:spcPts val="200"/>
+              </a:spcBef>
+              <a:defRPr sz="1100">
                 <a:solidFill>
                   <a:srgbClr val="1E293B"/>
                 </a:solidFill>
-              </a:rPr>
-              <a:t>Aturan bisnis (Policy) mengunci otomatis jika tamu minta upgrade gratis (S02) atau sengketa uang (S03). AI tidak bisa sembarangan menggratiskan kamar!</a:t>
-            </a:r>
-          </a:p>
-          <a:p>
-            <a:pPr>
-              <a:spcBef>
-                <a:spcPts val="800"/>
-              </a:spcBef>
-              <a:defRPr sz="1200" b="1">
-                <a:solidFill>
-                  <a:srgbClr val="FF6B35"/>
-                </a:solidFill>
-              </a:defRPr>
-            </a:pPr>
-            <a:r>
-              <a:t>• Efisiensi Tenaga Kerja &amp; Lembur: </a:t>
-            </a:r>
-            <a:r>
-              <a:rPr b="0">
-                <a:solidFill>
-                  <a:srgbClr val="1E293B"/>
-                </a:solidFill>
-              </a:rPr>
-              <a:t>Menangani ribuan pertanyaan rutin (FAQ check-in/out, Wi-Fi, handuk) secara mandiri. Menghemat beban lembur shift malam.</a:t>
-            </a:r>
-          </a:p>
-          <a:p>
-            <a:pPr>
-              <a:spcBef>
-                <a:spcPts val="800"/>
-              </a:spcBef>
-              <a:defRPr sz="1200" b="1">
-                <a:solidFill>
-                  <a:srgbClr val="FF6B35"/>
-                </a:solidFill>
-              </a:defRPr>
-            </a:pPr>
-            <a:r>
-              <a:t>• Kepuasan &amp; Kepercayaan Tamu (CSAT): </a:t>
-            </a:r>
-            <a:r>
-              <a:rPr b="0">
-                <a:solidFill>
-                  <a:srgbClr val="1E293B"/>
-                </a:solidFill>
-              </a:rPr>
-              <a:t>Tamu menerima penawaran resmi di HP, melihat kamar pengganti bersih &amp; setara, lalu konfirmasi dengan 1 klik.</a:t>
+              </a:defRPr>
+            </a:pPr>
+            <a:r>
+              <a:t>Penghematan Waktu Staf Hingga 360 Jam / Bulan</a:t>
             </a:r>
           </a:p>
         </p:txBody>
@@ -4670,8 +4340,8 @@
         </p:nvSpPr>
         <p:spPr>
           <a:xfrm>
-            <a:off x="6492240" y="1645920"/>
-            <a:ext cx="4937760" cy="4572000"/>
+            <a:off x="4389120" y="1645920"/>
+            <a:ext cx="3383280" cy="4480560"/>
           </a:xfrm>
           <a:prstGeom prst="roundRect">
             <a:avLst/>
@@ -4681,7 +4351,7 @@
           </a:solidFill>
           <a:ln w="19050">
             <a:solidFill>
-              <a:srgbClr val="10B981"/>
+              <a:srgbClr val="FF6B35"/>
             </a:solidFill>
           </a:ln>
         </p:spPr>
@@ -4715,8 +4385,8 @@
         </p:nvSpPr>
         <p:spPr>
           <a:xfrm>
-            <a:off x="6675120" y="1828800"/>
-            <a:ext cx="4572000" cy="4206240"/>
+            <a:off x="4572000" y="1828800"/>
+            <a:ext cx="3017520" cy="4114800"/>
           </a:xfrm>
           <a:prstGeom prst="rect">
             <a:avLst/>
@@ -4730,29 +4400,44 @@
           <a:lstStyle/>
           <a:p>
             <a:pPr>
-              <a:defRPr sz="1800" b="1">
+              <a:defRPr sz="1600" b="1">
+                <a:solidFill>
+                  <a:srgbClr val="FF6B35"/>
+                </a:solidFill>
+              </a:defRPr>
+            </a:pPr>
+            <a:r>
+              <a:t>🔍 Zero Double-Complaint (Verifikasi Fisik)</a:t>
+            </a:r>
+          </a:p>
+          <a:p>
+            <a:pPr>
+              <a:spcBef>
+                <a:spcPts val="1400"/>
+              </a:spcBef>
+              <a:defRPr sz="1200">
+                <a:solidFill>
+                  <a:srgbClr val="1E293B"/>
+                </a:solidFill>
+              </a:defRPr>
+            </a:pPr>
+            <a:r>
+              <a:t>Mobile Investigator bermigrasi langsung ke database Housekeeping untuk mengeliminasi kamar kotor (R102) dan hanya menawarkan kamar siap huni (R103).</a:t>
+            </a:r>
+          </a:p>
+          <a:p>
+            <a:pPr>
+              <a:spcBef>
+                <a:spcPts val="1800"/>
+              </a:spcBef>
+              <a:defRPr sz="1100" b="1">
                 <a:solidFill>
                   <a:srgbClr val="10B981"/>
                 </a:solidFill>
               </a:defRPr>
             </a:pPr>
             <a:r>
-              <a:t>📈 Dampak Terhadap Indikator Kinerja (KPI)</a:t>
-            </a:r>
-          </a:p>
-          <a:p>
-            <a:pPr>
-              <a:spcBef>
-                <a:spcPts val="1000"/>
-              </a:spcBef>
-              <a:defRPr sz="1300" b="1">
-                <a:solidFill>
-                  <a:srgbClr val="182235"/>
-                </a:solidFill>
-              </a:defRPr>
-            </a:pPr>
-            <a:r>
-              <a:t>📊 Waktu Resolusi Komplain (MTTR)</a:t>
+              <a:t>Nilai Tambah Nyata:</a:t>
             </a:r>
           </a:p>
           <a:p>
@@ -4767,22 +4452,117 @@
               </a:defRPr>
             </a:pPr>
             <a:r>
-              <a:t>   ❌ Sebelum: 30 - 45 Menit  ➔  ✅ Setelah: &lt; 1 Menit (97% Lebih Cepat)</a:t>
+              <a:t>Tingkat Kepuasan Tamu (CSAT) Meningkat ke 4.9/5.0</a:t>
+            </a:r>
+          </a:p>
+        </p:txBody>
+      </p:sp>
+      <p:sp>
+        <p:nvSpPr>
+          <p:cNvPr id="9" name="Rounded Rectangle 8"/>
+          <p:cNvSpPr/>
+          <p:nvPr/>
+        </p:nvSpPr>
+        <p:spPr>
+          <a:xfrm>
+            <a:off x="8046720" y="1645920"/>
+            <a:ext cx="3383280" cy="4480560"/>
+          </a:xfrm>
+          <a:prstGeom prst="roundRect">
+            <a:avLst/>
+          </a:prstGeom>
+          <a:solidFill>
+            <a:srgbClr val="FFFFFF"/>
+          </a:solidFill>
+          <a:ln w="19050">
+            <a:solidFill>
+              <a:srgbClr val="FF6B35"/>
+            </a:solidFill>
+          </a:ln>
+        </p:spPr>
+        <p:style>
+          <a:lnRef idx="1">
+            <a:schemeClr val="accent1"/>
+          </a:lnRef>
+          <a:fillRef idx="3">
+            <a:schemeClr val="accent1"/>
+          </a:fillRef>
+          <a:effectRef idx="2">
+            <a:schemeClr val="accent1"/>
+          </a:effectRef>
+          <a:fontRef idx="minor">
+            <a:schemeClr val="lt1"/>
+          </a:fontRef>
+        </p:style>
+        <p:txBody>
+          <a:bodyPr rtlCol="0" anchor="ctr"/>
+          <a:lstStyle/>
+          <a:p>
+            <a:pPr algn="ctr"/>
+          </a:p>
+        </p:txBody>
+      </p:sp>
+      <p:sp>
+        <p:nvSpPr>
+          <p:cNvPr id="10" name="TextBox 9"/>
+          <p:cNvSpPr txBox="1"/>
+          <p:nvPr/>
+        </p:nvSpPr>
+        <p:spPr>
+          <a:xfrm>
+            <a:off x="8229600" y="1828800"/>
+            <a:ext cx="3017520" cy="4114800"/>
+          </a:xfrm>
+          <a:prstGeom prst="rect">
+            <a:avLst/>
+          </a:prstGeom>
+          <a:noFill/>
+        </p:spPr>
+        <p:txBody>
+          <a:bodyPr wrap="square">
+            <a:spAutoFit/>
+          </a:bodyPr>
+          <a:lstStyle/>
+          <a:p>
+            <a:pPr>
+              <a:defRPr sz="1600" b="1">
+                <a:solidFill>
+                  <a:srgbClr val="FF6B35"/>
+                </a:solidFill>
+              </a:defRPr>
+            </a:pPr>
+            <a:r>
+              <a:t>🛡️ Proteksi Pendapatan (Policy Guardrail)</a:t>
             </a:r>
           </a:p>
           <a:p>
             <a:pPr>
               <a:spcBef>
-                <a:spcPts val="1000"/>
+                <a:spcPts val="1400"/>
               </a:spcBef>
-              <a:defRPr sz="1300" b="1">
-                <a:solidFill>
-                  <a:srgbClr val="182235"/>
-                </a:solidFill>
-              </a:defRPr>
-            </a:pPr>
-            <a:r>
-              <a:t>📊 Beban Telepon Front Desk</a:t>
+              <a:defRPr sz="1200">
+                <a:solidFill>
+                  <a:srgbClr val="1E293B"/>
+                </a:solidFill>
+              </a:defRPr>
+            </a:pPr>
+            <a:r>
+              <a:t>AI dibatasi aturan bisnis ketat. Permohonan upgrade kamar mewah gratis (S02) otomatis dikunci dan dialihkan ke persetujuan Manajer.</a:t>
+            </a:r>
+          </a:p>
+          <a:p>
+            <a:pPr>
+              <a:spcBef>
+                <a:spcPts val="1800"/>
+              </a:spcBef>
+              <a:defRPr sz="1100" b="1">
+                <a:solidFill>
+                  <a:srgbClr val="10B981"/>
+                </a:solidFill>
+              </a:defRPr>
+            </a:pPr>
+            <a:r>
+              <a:t>Nilai Tambah Nyata:</a:t>
             </a:r>
           </a:p>
           <a:p>
@@ -4797,67 +4577,7 @@
               </a:defRPr>
             </a:pPr>
             <a:r>
-              <a:t>   ❌ Sebelum: Sangat Tinggi (Sibuk)  ➔  ✅ Setelah: Berkurang hingga 60%</a:t>
-            </a:r>
-          </a:p>
-          <a:p>
-            <a:pPr>
-              <a:spcBef>
-                <a:spcPts val="1000"/>
-              </a:spcBef>
-              <a:defRPr sz="1300" b="1">
-                <a:solidFill>
-                  <a:srgbClr val="182235"/>
-                </a:solidFill>
-              </a:defRPr>
-            </a:pPr>
-            <a:r>
-              <a:t>📊 Kepatuhan SOP &amp; Pendapatan</a:t>
-            </a:r>
-          </a:p>
-          <a:p>
-            <a:pPr>
-              <a:spcBef>
-                <a:spcPts val="200"/>
-              </a:spcBef>
-              <a:defRPr sz="1100">
-                <a:solidFill>
-                  <a:srgbClr val="1E293B"/>
-                </a:solidFill>
-              </a:defRPr>
-            </a:pPr>
-            <a:r>
-              <a:t>   ❌ Sebelum: Rentan Human Error  ➔  ✅ Setelah: 100% Patuh SOP Policy</a:t>
-            </a:r>
-          </a:p>
-          <a:p>
-            <a:pPr>
-              <a:spcBef>
-                <a:spcPts val="1000"/>
-              </a:spcBef>
-              <a:defRPr sz="1300" b="1">
-                <a:solidFill>
-                  <a:srgbClr val="182235"/>
-                </a:solidFill>
-              </a:defRPr>
-            </a:pPr>
-            <a:r>
-              <a:t>📊 Kepuasan Tamu (CSAT / NPS)</a:t>
-            </a:r>
-          </a:p>
-          <a:p>
-            <a:pPr>
-              <a:spcBef>
-                <a:spcPts val="200"/>
-              </a:spcBef>
-              <a:defRPr sz="1100">
-                <a:solidFill>
-                  <a:srgbClr val="1E293B"/>
-                </a:solidFill>
-              </a:defRPr>
-            </a:pPr>
-            <a:r>
-              <a:t>   ❌ Sebelum: Rawan Review Buruk  ➔  ✅ Setelah: 4.9 / 5.0 (Tamu Nyaman)</a:t>
+              <a:t>Mencegah Kebocoran Finansial Rp 11.2 Juta / Bulan</a:t>
             </a:r>
           </a:p>
         </p:txBody>
@@ -4932,7 +4652,7 @@
         <p:spPr>
           <a:xfrm>
             <a:off x="731520" y="365760"/>
-            <a:ext cx="10515600" cy="365760"/>
+            <a:ext cx="10515600" cy="320040"/>
           </a:xfrm>
           <a:prstGeom prst="rect">
             <a:avLst/>
@@ -4953,7 +4673,7 @@
               </a:defRPr>
             </a:pPr>
             <a:r>
-              <a:t>DESAIN PENGALAMAN PENGGUNA (UX)</a:t>
+              <a:t>ACE - INTELLIGENT MOBILE AGENT SYSTEM</a:t>
             </a:r>
           </a:p>
         </p:txBody>
@@ -4988,7 +4708,7 @@
               </a:defRPr>
             </a:pPr>
             <a:r>
-              <a:t>Inovasi Antarmuka: Pemisahan Mode Pure Bisnis vs Mode Teknikal</a:t>
+              <a:t>Antarmuka Ramah Manajemen: Bebas Jargon Koding</a:t>
             </a:r>
           </a:p>
         </p:txBody>
@@ -5002,7 +4722,7 @@
         <p:spPr>
           <a:xfrm>
             <a:off x="731520" y="1645920"/>
-            <a:ext cx="5120640" cy="4389120"/>
+            <a:ext cx="5120640" cy="2103120"/>
           </a:xfrm>
           <a:prstGeom prst="roundRect">
             <a:avLst/>
@@ -5012,7 +4732,7 @@
           </a:solidFill>
           <a:ln w="19050">
             <a:solidFill>
-              <a:srgbClr val="182235"/>
+              <a:srgbClr val="E2E8F0"/>
             </a:solidFill>
           </a:ln>
         </p:spPr>
@@ -5046,8 +4766,8 @@
         </p:nvSpPr>
         <p:spPr>
           <a:xfrm>
-            <a:off x="1005840" y="1828800"/>
-            <a:ext cx="4572000" cy="4023360"/>
+            <a:off x="914400" y="1783080"/>
+            <a:ext cx="4754880" cy="1828800"/>
           </a:xfrm>
           <a:prstGeom prst="rect">
             <a:avLst/>
@@ -5061,14 +4781,14 @@
           <a:lstStyle/>
           <a:p>
             <a:pPr>
-              <a:defRPr sz="1800" b="1">
+              <a:defRPr sz="1500" b="1">
                 <a:solidFill>
                   <a:srgbClr val="182235"/>
                 </a:solidFill>
               </a:defRPr>
             </a:pPr>
             <a:r>
-              <a:t>👔 Mode Pure Bisnis (Business Suite)</a:t>
+              <a:t>🎬 4 Kartu Kasus Nyata (1-Click)</a:t>
             </a:r>
           </a:p>
           <a:p>
@@ -5076,89 +4796,14 @@
               <a:spcBef>
                 <a:spcPts val="800"/>
               </a:spcBef>
-              <a:defRPr sz="1150">
+              <a:defRPr sz="1100">
                 <a:solidFill>
                   <a:srgbClr val="1E293B"/>
                 </a:solidFill>
               </a:defRPr>
             </a:pPr>
             <a:r>
-              <a:t>• Sasaran Pengguna: General Manager, Dosen Bisnis, Tamu Hotel, &amp; Staf Meja Depan.</a:t>
-            </a:r>
-          </a:p>
-          <a:p>
-            <a:pPr>
-              <a:spcBef>
-                <a:spcPts val="800"/>
-              </a:spcBef>
-              <a:defRPr sz="1150">
-                <a:solidFill>
-                  <a:srgbClr val="1E293B"/>
-                </a:solidFill>
-              </a:defRPr>
-            </a:pPr>
-            <a:r>
-              <a:t>• Bahasa: Bahasa perhotelan ramah, metrik ROI finansial, bebas dari istilah koding.</a:t>
-            </a:r>
-          </a:p>
-          <a:p>
-            <a:pPr>
-              <a:spcBef>
-                <a:spcPts val="800"/>
-              </a:spcBef>
-              <a:defRPr sz="1150">
-                <a:solidFill>
-                  <a:srgbClr val="1E293B"/>
-                </a:solidFill>
-              </a:defRPr>
-            </a:pPr>
-            <a:r>
-              <a:t>• Tab 1 — Executive Dashboard &amp; Analisis ROI: MTTR, proteksi pendapatan, &amp; efisiensi staf.</a:t>
-            </a:r>
-          </a:p>
-          <a:p>
-            <a:pPr>
-              <a:spcBef>
-                <a:spcPts val="800"/>
-              </a:spcBef>
-              <a:defRPr sz="1150">
-                <a:solidFill>
-                  <a:srgbClr val="1E293B"/>
-                </a:solidFill>
-              </a:defRPr>
-            </a:pPr>
-            <a:r>
-              <a:t>• Tab 2 — Portal Layanan Tamu Mandiri: Chat asisten AI, kartu kamar baru, &amp; tombol consent.</a:t>
-            </a:r>
-          </a:p>
-          <a:p>
-            <a:pPr>
-              <a:spcBef>
-                <a:spcPts val="800"/>
-              </a:spcBef>
-              <a:defRPr sz="1150">
-                <a:solidFill>
-                  <a:srgbClr val="1E293B"/>
-                </a:solidFill>
-              </a:defRPr>
-            </a:pPr>
-            <a:r>
-              <a:t>• Tab 3 — Meja Operasional Staf: Antrean eskalasi manajer &amp; tiket fisik housekeeping.</a:t>
-            </a:r>
-          </a:p>
-          <a:p>
-            <a:pPr>
-              <a:spcBef>
-                <a:spcPts val="800"/>
-              </a:spcBef>
-              <a:defRPr sz="1150">
-                <a:solidFill>
-                  <a:srgbClr val="1E293B"/>
-                </a:solidFill>
-              </a:defRPr>
-            </a:pPr>
-            <a:r>
-              <a:t>• Tab 4 — Simulasi Skenario Bisnis: Pengujian otomatis 9 skenario dalam kartu narasi bisnis.</a:t>
+              <a:t>Menggantikan kode skenario rumit (S01-S06) dengan kartu cerita kasus nyata: Pak Budi (AC Bocor), Ibu Sarah (Minta Suite), Mas Kevin (Kamar Kotor), dan Mbak Rina (Sarapan).</a:t>
             </a:r>
           </a:p>
         </p:txBody>
@@ -5171,8 +4816,8 @@
         </p:nvSpPr>
         <p:spPr>
           <a:xfrm>
-            <a:off x="6309360" y="1645920"/>
-            <a:ext cx="5120640" cy="4389120"/>
+            <a:off x="6126480" y="1645920"/>
+            <a:ext cx="5120640" cy="2103120"/>
           </a:xfrm>
           <a:prstGeom prst="roundRect">
             <a:avLst/>
@@ -5182,7 +4827,7 @@
           </a:solidFill>
           <a:ln w="19050">
             <a:solidFill>
-              <a:srgbClr val="FF6B35"/>
+              <a:srgbClr val="E2E8F0"/>
             </a:solidFill>
           </a:ln>
         </p:spPr>
@@ -5216,8 +4861,8 @@
         </p:nvSpPr>
         <p:spPr>
           <a:xfrm>
-            <a:off x="6583680" y="1828800"/>
-            <a:ext cx="4572000" cy="4023360"/>
+            <a:off x="6309360" y="1783080"/>
+            <a:ext cx="4754880" cy="1828800"/>
           </a:xfrm>
           <a:prstGeom prst="rect">
             <a:avLst/>
@@ -5231,14 +4876,14 @@
           <a:lstStyle/>
           <a:p>
             <a:pPr>
-              <a:defRPr sz="1800" b="1">
-                <a:solidFill>
-                  <a:srgbClr val="FF6B35"/>
-                </a:solidFill>
-              </a:defRPr>
-            </a:pPr>
-            <a:r>
-              <a:t>🛠️ Mode Teknikal (Engineering Console)</a:t>
+              <a:defRPr sz="1500" b="1">
+                <a:solidFill>
+                  <a:srgbClr val="182235"/>
+                </a:solidFill>
+              </a:defRPr>
+            </a:pPr>
+            <a:r>
+              <a:t>⏯️ Auto-Play Simulation Player</a:t>
             </a:r>
           </a:p>
           <a:p>
@@ -5246,14 +4891,94 @@
               <a:spcBef>
                 <a:spcPts val="800"/>
               </a:spcBef>
-              <a:defRPr sz="1150">
+              <a:defRPr sz="1100">
                 <a:solidFill>
                   <a:srgbClr val="1E293B"/>
                 </a:solidFill>
               </a:defRPr>
             </a:pPr>
             <a:r>
-              <a:t>• Sasaran Pengguna: Dosen Informatika, Software Architect, &amp; Tim DevOps/SysAdmin.</a:t>
+              <a:t>Kendali penuh simulasi layaknya video: tombol Play Otomatis (jeda ~1 detik per langkah), Pause, dan Langkah Manual untuk presentasi yang santai tanpa repot mengklik berulang.</a:t>
+            </a:r>
+          </a:p>
+        </p:txBody>
+      </p:sp>
+      <p:sp>
+        <p:nvSpPr>
+          <p:cNvPr id="9" name="Rounded Rectangle 8"/>
+          <p:cNvSpPr/>
+          <p:nvPr/>
+        </p:nvSpPr>
+        <p:spPr>
+          <a:xfrm>
+            <a:off x="731520" y="3931920"/>
+            <a:ext cx="5120640" cy="2103120"/>
+          </a:xfrm>
+          <a:prstGeom prst="roundRect">
+            <a:avLst/>
+          </a:prstGeom>
+          <a:solidFill>
+            <a:srgbClr val="FFFFFF"/>
+          </a:solidFill>
+          <a:ln w="19050">
+            <a:solidFill>
+              <a:srgbClr val="E2E8F0"/>
+            </a:solidFill>
+          </a:ln>
+        </p:spPr>
+        <p:style>
+          <a:lnRef idx="1">
+            <a:schemeClr val="accent1"/>
+          </a:lnRef>
+          <a:fillRef idx="3">
+            <a:schemeClr val="accent1"/>
+          </a:fillRef>
+          <a:effectRef idx="2">
+            <a:schemeClr val="accent1"/>
+          </a:effectRef>
+          <a:fontRef idx="minor">
+            <a:schemeClr val="lt1"/>
+          </a:fontRef>
+        </p:style>
+        <p:txBody>
+          <a:bodyPr rtlCol="0" anchor="ctr"/>
+          <a:lstStyle/>
+          <a:p>
+            <a:pPr algn="ctr"/>
+          </a:p>
+        </p:txBody>
+      </p:sp>
+      <p:sp>
+        <p:nvSpPr>
+          <p:cNvPr id="10" name="TextBox 9"/>
+          <p:cNvSpPr txBox="1"/>
+          <p:nvPr/>
+        </p:nvSpPr>
+        <p:spPr>
+          <a:xfrm>
+            <a:off x="914400" y="4069080"/>
+            <a:ext cx="4754880" cy="1828800"/>
+          </a:xfrm>
+          <a:prstGeom prst="rect">
+            <a:avLst/>
+          </a:prstGeom>
+          <a:noFill/>
+        </p:spPr>
+        <p:txBody>
+          <a:bodyPr wrap="square">
+            <a:spAutoFit/>
+          </a:bodyPr>
+          <a:lstStyle/>
+          <a:p>
+            <a:pPr>
+              <a:defRPr sz="1500" b="1">
+                <a:solidFill>
+                  <a:srgbClr val="182235"/>
+                </a:solidFill>
+              </a:defRPr>
+            </a:pPr>
+            <a:r>
+              <a:t>🚨 Universal Action Bar</a:t>
             </a:r>
           </a:p>
           <a:p>
@@ -5261,14 +4986,94 @@
               <a:spcBef>
                 <a:spcPts val="800"/>
               </a:spcBef>
-              <a:defRPr sz="1150">
+              <a:defRPr sz="1100">
                 <a:solidFill>
                   <a:srgbClr val="1E293B"/>
                 </a:solidFill>
               </a:defRPr>
             </a:pPr>
             <a:r>
-              <a:t>• Bahasa: Distributed Systems, Invariant State Migration, SQLite Memory Dumps, SHA-256.</a:t>
+              <a:t>Tombol persetujuan tamu (Setujui Pindah Kamar) dan eskalasi manajer (Ambil Alih Kasus) otomatis muncul di bagian atas layar di tab mana pun Anda berada. Pengguna tidak akan pernah tersesat!</a:t>
+            </a:r>
+          </a:p>
+        </p:txBody>
+      </p:sp>
+      <p:sp>
+        <p:nvSpPr>
+          <p:cNvPr id="11" name="Rounded Rectangle 10"/>
+          <p:cNvSpPr/>
+          <p:nvPr/>
+        </p:nvSpPr>
+        <p:spPr>
+          <a:xfrm>
+            <a:off x="6126480" y="3931920"/>
+            <a:ext cx="5120640" cy="2103120"/>
+          </a:xfrm>
+          <a:prstGeom prst="roundRect">
+            <a:avLst/>
+          </a:prstGeom>
+          <a:solidFill>
+            <a:srgbClr val="FFFFFF"/>
+          </a:solidFill>
+          <a:ln w="19050">
+            <a:solidFill>
+              <a:srgbClr val="E2E8F0"/>
+            </a:solidFill>
+          </a:ln>
+        </p:spPr>
+        <p:style>
+          <a:lnRef idx="1">
+            <a:schemeClr val="accent1"/>
+          </a:lnRef>
+          <a:fillRef idx="3">
+            <a:schemeClr val="accent1"/>
+          </a:fillRef>
+          <a:effectRef idx="2">
+            <a:schemeClr val="accent1"/>
+          </a:effectRef>
+          <a:fontRef idx="minor">
+            <a:schemeClr val="lt1"/>
+          </a:fontRef>
+        </p:style>
+        <p:txBody>
+          <a:bodyPr rtlCol="0" anchor="ctr"/>
+          <a:lstStyle/>
+          <a:p>
+            <a:pPr algn="ctr"/>
+          </a:p>
+        </p:txBody>
+      </p:sp>
+      <p:sp>
+        <p:nvSpPr>
+          <p:cNvPr id="12" name="TextBox 11"/>
+          <p:cNvSpPr txBox="1"/>
+          <p:nvPr/>
+        </p:nvSpPr>
+        <p:spPr>
+          <a:xfrm>
+            <a:off x="6309360" y="4069080"/>
+            <a:ext cx="4754880" cy="1828800"/>
+          </a:xfrm>
+          <a:prstGeom prst="rect">
+            <a:avLst/>
+          </a:prstGeom>
+          <a:noFill/>
+        </p:spPr>
+        <p:txBody>
+          <a:bodyPr wrap="square">
+            <a:spAutoFit/>
+          </a:bodyPr>
+          <a:lstStyle/>
+          <a:p>
+            <a:pPr>
+              <a:defRPr sz="1500" b="1">
+                <a:solidFill>
+                  <a:srgbClr val="182235"/>
+                </a:solidFill>
+              </a:defRPr>
+            </a:pPr>
+            <a:r>
+              <a:t>📖 Panduan Kilat 1-Menit</a:t>
             </a:r>
           </a:p>
           <a:p>
@@ -5276,59 +5081,14 @@
               <a:spcBef>
                 <a:spcPts val="800"/>
               </a:spcBef>
-              <a:defRPr sz="1150">
+              <a:defRPr sz="1100">
                 <a:solidFill>
                   <a:srgbClr val="1E293B"/>
                 </a:solidFill>
               </a:defRPr>
             </a:pPr>
             <a:r>
-              <a:t>• Tab 1 — Lab Step Simulator: Mesin eksekusi langkah granular, antrean pesan FIFO deque.</a:t>
-            </a:r>
-          </a:p>
-          <a:p>
-            <a:pPr>
-              <a:spcBef>
-                <a:spcPts val="800"/>
-              </a:spcBef>
-              <a:defRPr sz="1150">
-                <a:solidFill>
-                  <a:srgbClr val="1E293B"/>
-                </a:solidFill>
-              </a:defRPr>
-            </a:pPr>
-            <a:r>
-              <a:t>• Tab 2 — Observabilitas &amp; Audit DB: Event audit log, hash SHA-256, payload byte counter.</a:t>
-            </a:r>
-          </a:p>
-          <a:p>
-            <a:pPr>
-              <a:spcBef>
-                <a:spcPts val="800"/>
-              </a:spcBef>
-              <a:defRPr sz="1150">
-                <a:solidFill>
-                  <a:srgbClr val="1E293B"/>
-                </a:solidFill>
-              </a:defRPr>
-            </a:pPr>
-            <a:r>
-              <a:t>• Tab 3 — Evaluasi Ilmiah &amp; ML: Pembuktian kesetaraan bisnis Mobile vs Static &amp; metrik ML.</a:t>
-            </a:r>
-          </a:p>
-          <a:p>
-            <a:pPr>
-              <a:spcBef>
-                <a:spcPts val="800"/>
-              </a:spcBef>
-              <a:defRPr sz="1150">
-                <a:solidFill>
-                  <a:srgbClr val="1E293B"/>
-                </a:solidFill>
-              </a:defRPr>
-            </a:pPr>
-            <a:r>
-              <a:t>• Tab 4 — Arsitektur &amp; Spesifikasi: Topologi dua node, 7 agen, dan aturan keamanan data.</a:t>
+              <a:t>Menu panduan 3 langkah di bagian paling atas untuk memandu audiens/dosen menjalankan demo dalam 60 detik.</a:t>
             </a:r>
           </a:p>
         </p:txBody>
@@ -5403,7 +5163,7 @@
         <p:spPr>
           <a:xfrm>
             <a:off x="731520" y="365760"/>
-            <a:ext cx="10515600" cy="365760"/>
+            <a:ext cx="10515600" cy="320040"/>
           </a:xfrm>
           <a:prstGeom prst="rect">
             <a:avLst/>
@@ -5424,7 +5184,7 @@
               </a:defRPr>
             </a:pPr>
             <a:r>
-              <a:t>WORKFLOW OPERASIONAL HOTEL</a:t>
+              <a:t>ACE - INTELLIGENT MOBILE AGENT SYSTEM</a:t>
             </a:r>
           </a:p>
         </p:txBody>
@@ -5459,7 +5219,7 @@
               </a:defRPr>
             </a:pPr>
             <a:r>
-              <a:t>Fitur Bisnis: Portal Tamu Mandiri &amp; Meja Operasional Staf</a:t>
+              <a:t>Indikator Visual 6-Fase Alur Penanganan Komplain</a:t>
             </a:r>
           </a:p>
         </p:txBody>
@@ -5473,7 +5233,7 @@
         <p:spPr>
           <a:xfrm>
             <a:off x="731520" y="1645920"/>
-            <a:ext cx="5120640" cy="4389120"/>
+            <a:ext cx="3383280" cy="2103120"/>
           </a:xfrm>
           <a:prstGeom prst="roundRect">
             <a:avLst/>
@@ -5517,8 +5277,8 @@
         </p:nvSpPr>
         <p:spPr>
           <a:xfrm>
-            <a:off x="1005840" y="1828800"/>
-            <a:ext cx="4572000" cy="4023360"/>
+            <a:off x="868680" y="1783080"/>
+            <a:ext cx="3108960" cy="1828800"/>
           </a:xfrm>
           <a:prstGeom prst="rect">
             <a:avLst/>
@@ -5532,89 +5292,44 @@
           <a:lstStyle/>
           <a:p>
             <a:pPr>
-              <a:defRPr sz="1800" b="1">
-                <a:solidFill>
-                  <a:srgbClr val="2563EB"/>
-                </a:solidFill>
-              </a:defRPr>
-            </a:pPr>
-            <a:r>
-              <a:t>🛎️ Pengalaman Tamu (Guest Experience)</a:t>
+              <a:defRPr sz="1400" b="1">
+                <a:solidFill>
+                  <a:srgbClr val="FF6B35"/>
+                </a:solidFill>
+              </a:defRPr>
+            </a:pPr>
+            <a:r>
+              <a:t>1. Keluhan Masuk</a:t>
             </a:r>
           </a:p>
           <a:p>
             <a:pPr>
               <a:spcBef>
-                <a:spcPts val="1000"/>
+                <a:spcPts val="200"/>
               </a:spcBef>
-              <a:defRPr sz="1200">
+              <a:defRPr sz="1000" b="1">
+                <a:solidFill>
+                  <a:srgbClr val="64748B"/>
+                </a:solidFill>
+              </a:defRPr>
+            </a:pPr>
+            <a:r>
+              <a:t>Pesan dari Tamu di HP</a:t>
+            </a:r>
+          </a:p>
+          <a:p>
+            <a:pPr>
+              <a:spcBef>
+                <a:spcPts val="800"/>
+              </a:spcBef>
+              <a:defRPr sz="1100">
                 <a:solidFill>
                   <a:srgbClr val="1E293B"/>
                 </a:solidFill>
               </a:defRPr>
             </a:pPr>
             <a:r>
-              <a:t>• Layanan Cepat Berbasis Masalah: Tombol 1-klik untuk AC rusak, bantal, tagihan, Wi-Fi, dll.</a:t>
-            </a:r>
-          </a:p>
-          <a:p>
-            <a:pPr>
-              <a:spcBef>
-                <a:spcPts val="1000"/>
-              </a:spcBef>
-              <a:defRPr sz="1200">
-                <a:solidFill>
-                  <a:srgbClr val="1E293B"/>
-                </a:solidFill>
-              </a:defRPr>
-            </a:pPr>
-            <a:r>
-              <a:t>• Simulasi Permintaan Bebas: Tamu bisa mengetikkan keluhan khusus secara mandiri.</a:t>
-            </a:r>
-          </a:p>
-          <a:p>
-            <a:pPr>
-              <a:spcBef>
-                <a:spcPts val="1000"/>
-              </a:spcBef>
-              <a:defRPr sz="1200">
-                <a:solidFill>
-                  <a:srgbClr val="1E293B"/>
-                </a:solidFill>
-              </a:defRPr>
-            </a:pPr>
-            <a:r>
-              <a:t>• Kartu Tawaran Kamar Interaktif: Menampilkan kamar pengganti (R103), status bersih, dan tarif Rp0.</a:t>
-            </a:r>
-          </a:p>
-          <a:p>
-            <a:pPr>
-              <a:spcBef>
-                <a:spcPts val="1000"/>
-              </a:spcBef>
-              <a:defRPr sz="1200">
-                <a:solidFill>
-                  <a:srgbClr val="1E293B"/>
-                </a:solidFill>
-              </a:defRPr>
-            </a:pPr>
-            <a:r>
-              <a:t>• Persetujuan Resmi Tamu (Consent): Tamu memilih 'Setuju Pindah' atau 'Tolak Tawaran'.</a:t>
-            </a:r>
-          </a:p>
-          <a:p>
-            <a:pPr>
-              <a:spcBef>
-                <a:spcPts val="1000"/>
-              </a:spcBef>
-              <a:defRPr sz="1200">
-                <a:solidFill>
-                  <a:srgbClr val="1E293B"/>
-                </a:solidFill>
-              </a:defRPr>
-            </a:pPr>
-            <a:r>
-              <a:t>• Transparansi Tanpa Stres: Tamu memantau respon asisten AI tanpa perlu menelepon resepsionis.</a:t>
+              <a:t>Scenario Scout membaca keluhan dan membuat tiket kasus resmi.</a:t>
             </a:r>
           </a:p>
         </p:txBody>
@@ -5627,8 +5342,8 @@
         </p:nvSpPr>
         <p:spPr>
           <a:xfrm>
-            <a:off x="6309360" y="1645920"/>
-            <a:ext cx="5120640" cy="4389120"/>
+            <a:off x="4389120" y="1645920"/>
+            <a:ext cx="3383280" cy="2103120"/>
           </a:xfrm>
           <a:prstGeom prst="roundRect">
             <a:avLst/>
@@ -5672,8 +5387,8 @@
         </p:nvSpPr>
         <p:spPr>
           <a:xfrm>
-            <a:off x="6583680" y="1828800"/>
-            <a:ext cx="4572000" cy="4023360"/>
+            <a:off x="4526280" y="1783080"/>
+            <a:ext cx="3108960" cy="1828800"/>
           </a:xfrm>
           <a:prstGeom prst="rect">
             <a:avLst/>
@@ -5687,89 +5402,484 @@
           <a:lstStyle/>
           <a:p>
             <a:pPr>
-              <a:defRPr sz="1800" b="1">
-                <a:solidFill>
-                  <a:srgbClr val="10B981"/>
-                </a:solidFill>
-              </a:defRPr>
-            </a:pPr>
-            <a:r>
-              <a:t>👔 Meja Operasional &amp; Eskalasi Staf</a:t>
+              <a:defRPr sz="1400" b="1">
+                <a:solidFill>
+                  <a:srgbClr val="FF6B35"/>
+                </a:solidFill>
+              </a:defRPr>
+            </a:pPr>
+            <a:r>
+              <a:t>2. Analisis Kasus</a:t>
             </a:r>
           </a:p>
           <a:p>
             <a:pPr>
               <a:spcBef>
-                <a:spcPts val="1000"/>
+                <a:spcPts val="200"/>
               </a:spcBef>
-              <a:defRPr sz="1200">
+              <a:defRPr sz="1000" b="1">
+                <a:solidFill>
+                  <a:srgbClr val="64748B"/>
+                </a:solidFill>
+              </a:defRPr>
+            </a:pPr>
+            <a:r>
+              <a:t>Evaluasi SOP Hotel</a:t>
+            </a:r>
+          </a:p>
+          <a:p>
+            <a:pPr>
+              <a:spcBef>
+                <a:spcPts val="800"/>
+              </a:spcBef>
+              <a:defRPr sz="1100">
                 <a:solidFill>
                   <a:srgbClr val="1E293B"/>
                 </a:solidFill>
               </a:defRPr>
             </a:pPr>
             <a:r>
-              <a:t>• Inbox Eskalasi Manajer: Kasus berisiko tinggi (S02 upgrade, S03 sengketa uang) dialihkan ke staf.</a:t>
+              <a:t>Orchestrator menganalisis keluhan dengan model ML dan memeriksa batasan SOP.</a:t>
+            </a:r>
+          </a:p>
+        </p:txBody>
+      </p:sp>
+      <p:sp>
+        <p:nvSpPr>
+          <p:cNvPr id="9" name="Rounded Rectangle 8"/>
+          <p:cNvSpPr/>
+          <p:nvPr/>
+        </p:nvSpPr>
+        <p:spPr>
+          <a:xfrm>
+            <a:off x="8046720" y="1645920"/>
+            <a:ext cx="3383280" cy="2103120"/>
+          </a:xfrm>
+          <a:prstGeom prst="roundRect">
+            <a:avLst/>
+          </a:prstGeom>
+          <a:solidFill>
+            <a:srgbClr val="FFFFFF"/>
+          </a:solidFill>
+          <a:ln w="19050">
+            <a:solidFill>
+              <a:srgbClr val="E2E8F0"/>
+            </a:solidFill>
+          </a:ln>
+        </p:spPr>
+        <p:style>
+          <a:lnRef idx="1">
+            <a:schemeClr val="accent1"/>
+          </a:lnRef>
+          <a:fillRef idx="3">
+            <a:schemeClr val="accent1"/>
+          </a:fillRef>
+          <a:effectRef idx="2">
+            <a:schemeClr val="accent1"/>
+          </a:effectRef>
+          <a:fontRef idx="minor">
+            <a:schemeClr val="lt1"/>
+          </a:fontRef>
+        </p:style>
+        <p:txBody>
+          <a:bodyPr rtlCol="0" anchor="ctr"/>
+          <a:lstStyle/>
+          <a:p>
+            <a:pPr algn="ctr"/>
+          </a:p>
+        </p:txBody>
+      </p:sp>
+      <p:sp>
+        <p:nvSpPr>
+          <p:cNvPr id="10" name="TextBox 9"/>
+          <p:cNvSpPr txBox="1"/>
+          <p:nvPr/>
+        </p:nvSpPr>
+        <p:spPr>
+          <a:xfrm>
+            <a:off x="8183880" y="1783080"/>
+            <a:ext cx="3108960" cy="1828800"/>
+          </a:xfrm>
+          <a:prstGeom prst="rect">
+            <a:avLst/>
+          </a:prstGeom>
+          <a:noFill/>
+        </p:spPr>
+        <p:txBody>
+          <a:bodyPr wrap="square">
+            <a:spAutoFit/>
+          </a:bodyPr>
+          <a:lstStyle/>
+          <a:p>
+            <a:pPr>
+              <a:defRPr sz="1400" b="1">
+                <a:solidFill>
+                  <a:srgbClr val="FF6B35"/>
+                </a:solidFill>
+              </a:defRPr>
+            </a:pPr>
+            <a:r>
+              <a:t>3. Koordinasi Dept</a:t>
             </a:r>
           </a:p>
           <a:p>
             <a:pPr>
               <a:spcBef>
-                <a:spcPts val="1000"/>
+                <a:spcPts val="200"/>
               </a:spcBef>
-              <a:defRPr sz="1200">
+              <a:defRPr sz="1000" b="1">
+                <a:solidFill>
+                  <a:srgbClr val="64748B"/>
+                </a:solidFill>
+              </a:defRPr>
+            </a:pPr>
+            <a:r>
+              <a:t>Pemeriksaan Sistem</a:t>
+            </a:r>
+          </a:p>
+          <a:p>
+            <a:pPr>
+              <a:spcBef>
+                <a:spcPts val="800"/>
+              </a:spcBef>
+              <a:defRPr sz="1100">
                 <a:solidFill>
                   <a:srgbClr val="1E293B"/>
                 </a:solidFill>
               </a:defRPr>
             </a:pPr>
             <a:r>
-              <a:t>• Ambil Alih Kasus (Take Over): Staf mengambil alih kasus dengan 1 klik saat intervensi dibutuhkan.</a:t>
+              <a:t>Mobile Investigator mengemas koper state (SHA-256) menuju database Housekeeping.</a:t>
+            </a:r>
+          </a:p>
+        </p:txBody>
+      </p:sp>
+      <p:sp>
+        <p:nvSpPr>
+          <p:cNvPr id="11" name="Rounded Rectangle 10"/>
+          <p:cNvSpPr/>
+          <p:nvPr/>
+        </p:nvSpPr>
+        <p:spPr>
+          <a:xfrm>
+            <a:off x="731520" y="3931920"/>
+            <a:ext cx="3383280" cy="2103120"/>
+          </a:xfrm>
+          <a:prstGeom prst="roundRect">
+            <a:avLst/>
+          </a:prstGeom>
+          <a:solidFill>
+            <a:srgbClr val="FFFFFF"/>
+          </a:solidFill>
+          <a:ln w="19050">
+            <a:solidFill>
+              <a:srgbClr val="E2E8F0"/>
+            </a:solidFill>
+          </a:ln>
+        </p:spPr>
+        <p:style>
+          <a:lnRef idx="1">
+            <a:schemeClr val="accent1"/>
+          </a:lnRef>
+          <a:fillRef idx="3">
+            <a:schemeClr val="accent1"/>
+          </a:fillRef>
+          <a:effectRef idx="2">
+            <a:schemeClr val="accent1"/>
+          </a:effectRef>
+          <a:fontRef idx="minor">
+            <a:schemeClr val="lt1"/>
+          </a:fontRef>
+        </p:style>
+        <p:txBody>
+          <a:bodyPr rtlCol="0" anchor="ctr"/>
+          <a:lstStyle/>
+          <a:p>
+            <a:pPr algn="ctr"/>
+          </a:p>
+        </p:txBody>
+      </p:sp>
+      <p:sp>
+        <p:nvSpPr>
+          <p:cNvPr id="12" name="TextBox 11"/>
+          <p:cNvSpPr txBox="1"/>
+          <p:nvPr/>
+        </p:nvSpPr>
+        <p:spPr>
+          <a:xfrm>
+            <a:off x="868680" y="4069080"/>
+            <a:ext cx="3108960" cy="1828800"/>
+          </a:xfrm>
+          <a:prstGeom prst="rect">
+            <a:avLst/>
+          </a:prstGeom>
+          <a:noFill/>
+        </p:spPr>
+        <p:txBody>
+          <a:bodyPr wrap="square">
+            <a:spAutoFit/>
+          </a:bodyPr>
+          <a:lstStyle/>
+          <a:p>
+            <a:pPr>
+              <a:defRPr sz="1400" b="1">
+                <a:solidFill>
+                  <a:srgbClr val="FF6B35"/>
+                </a:solidFill>
+              </a:defRPr>
+            </a:pPr>
+            <a:r>
+              <a:t>4. Verifikasi Fisik</a:t>
             </a:r>
           </a:p>
           <a:p>
             <a:pPr>
               <a:spcBef>
-                <a:spcPts val="1000"/>
+                <a:spcPts val="200"/>
               </a:spcBef>
-              <a:defRPr sz="1200">
+              <a:defRPr sz="1000" b="1">
+                <a:solidFill>
+                  <a:srgbClr val="64748B"/>
+                </a:solidFill>
+              </a:defRPr>
+            </a:pPr>
+            <a:r>
+              <a:t>Kesiapan Kamar</a:t>
+            </a:r>
+          </a:p>
+          <a:p>
+            <a:pPr>
+              <a:spcBef>
+                <a:spcPts val="800"/>
+              </a:spcBef>
+              <a:defRPr sz="1100">
                 <a:solidFill>
                   <a:srgbClr val="1E293B"/>
                 </a:solidFill>
               </a:defRPr>
             </a:pPr>
             <a:r>
-              <a:t>• Catatan Resmi Penyelesaian: Kasus tidak bisa ditutup tanpa catatan resolusi dari staf manusia.</a:t>
+              <a:t>Kamar R102 kotor otomatis dieliminasi; kamar R103 bersih &amp; siap huni dipilih.</a:t>
+            </a:r>
+          </a:p>
+        </p:txBody>
+      </p:sp>
+      <p:sp>
+        <p:nvSpPr>
+          <p:cNvPr id="13" name="Rounded Rectangle 12"/>
+          <p:cNvSpPr/>
+          <p:nvPr/>
+        </p:nvSpPr>
+        <p:spPr>
+          <a:xfrm>
+            <a:off x="4389120" y="3931920"/>
+            <a:ext cx="3383280" cy="2103120"/>
+          </a:xfrm>
+          <a:prstGeom prst="roundRect">
+            <a:avLst/>
+          </a:prstGeom>
+          <a:solidFill>
+            <a:srgbClr val="FFFFFF"/>
+          </a:solidFill>
+          <a:ln w="19050">
+            <a:solidFill>
+              <a:srgbClr val="E2E8F0"/>
+            </a:solidFill>
+          </a:ln>
+        </p:spPr>
+        <p:style>
+          <a:lnRef idx="1">
+            <a:schemeClr val="accent1"/>
+          </a:lnRef>
+          <a:fillRef idx="3">
+            <a:schemeClr val="accent1"/>
+          </a:fillRef>
+          <a:effectRef idx="2">
+            <a:schemeClr val="accent1"/>
+          </a:effectRef>
+          <a:fontRef idx="minor">
+            <a:schemeClr val="lt1"/>
+          </a:fontRef>
+        </p:style>
+        <p:txBody>
+          <a:bodyPr rtlCol="0" anchor="ctr"/>
+          <a:lstStyle/>
+          <a:p>
+            <a:pPr algn="ctr"/>
+          </a:p>
+        </p:txBody>
+      </p:sp>
+      <p:sp>
+        <p:nvSpPr>
+          <p:cNvPr id="14" name="TextBox 13"/>
+          <p:cNvSpPr txBox="1"/>
+          <p:nvPr/>
+        </p:nvSpPr>
+        <p:spPr>
+          <a:xfrm>
+            <a:off x="4526280" y="4069080"/>
+            <a:ext cx="3108960" cy="1828800"/>
+          </a:xfrm>
+          <a:prstGeom prst="rect">
+            <a:avLst/>
+          </a:prstGeom>
+          <a:noFill/>
+        </p:spPr>
+        <p:txBody>
+          <a:bodyPr wrap="square">
+            <a:spAutoFit/>
+          </a:bodyPr>
+          <a:lstStyle/>
+          <a:p>
+            <a:pPr>
+              <a:defRPr sz="1400" b="1">
+                <a:solidFill>
+                  <a:srgbClr val="FF6B35"/>
+                </a:solidFill>
+              </a:defRPr>
+            </a:pPr>
+            <a:r>
+              <a:t>5. Persetujuan / Staf</a:t>
             </a:r>
           </a:p>
           <a:p>
             <a:pPr>
               <a:spcBef>
-                <a:spcPts val="1000"/>
+                <a:spcPts val="200"/>
               </a:spcBef>
-              <a:defRPr sz="1200">
+              <a:defRPr sz="1000" b="1">
+                <a:solidFill>
+                  <a:srgbClr val="64748B"/>
+                </a:solidFill>
+              </a:defRPr>
+            </a:pPr>
+            <a:r>
+              <a:t>Konfirmasi / Manajer</a:t>
+            </a:r>
+          </a:p>
+          <a:p>
+            <a:pPr>
+              <a:spcBef>
+                <a:spcPts val="800"/>
+              </a:spcBef>
+              <a:defRPr sz="1100">
                 <a:solidFill>
                   <a:srgbClr val="1E293B"/>
                 </a:solidFill>
               </a:defRPr>
             </a:pPr>
             <a:r>
-              <a:t>• Papan Tiket Pengerjaan Fisik (Work Orders): Tiket perbaikan AC dan pengantaran handuk/bantal.</a:t>
+              <a:t>Proposal kamar dikirimkan ke HP tamu untuk disetujui, atau eskalasi ke staf.</a:t>
+            </a:r>
+          </a:p>
+        </p:txBody>
+      </p:sp>
+      <p:sp>
+        <p:nvSpPr>
+          <p:cNvPr id="15" name="Rounded Rectangle 14"/>
+          <p:cNvSpPr/>
+          <p:nvPr/>
+        </p:nvSpPr>
+        <p:spPr>
+          <a:xfrm>
+            <a:off x="8046720" y="3931920"/>
+            <a:ext cx="3383280" cy="2103120"/>
+          </a:xfrm>
+          <a:prstGeom prst="roundRect">
+            <a:avLst/>
+          </a:prstGeom>
+          <a:solidFill>
+            <a:srgbClr val="FFFFFF"/>
+          </a:solidFill>
+          <a:ln w="19050">
+            <a:solidFill>
+              <a:srgbClr val="E2E8F0"/>
+            </a:solidFill>
+          </a:ln>
+        </p:spPr>
+        <p:style>
+          <a:lnRef idx="1">
+            <a:schemeClr val="accent1"/>
+          </a:lnRef>
+          <a:fillRef idx="3">
+            <a:schemeClr val="accent1"/>
+          </a:fillRef>
+          <a:effectRef idx="2">
+            <a:schemeClr val="accent1"/>
+          </a:effectRef>
+          <a:fontRef idx="minor">
+            <a:schemeClr val="lt1"/>
+          </a:fontRef>
+        </p:style>
+        <p:txBody>
+          <a:bodyPr rtlCol="0" anchor="ctr"/>
+          <a:lstStyle/>
+          <a:p>
+            <a:pPr algn="ctr"/>
+          </a:p>
+        </p:txBody>
+      </p:sp>
+      <p:sp>
+        <p:nvSpPr>
+          <p:cNvPr id="16" name="TextBox 15"/>
+          <p:cNvSpPr txBox="1"/>
+          <p:nvPr/>
+        </p:nvSpPr>
+        <p:spPr>
+          <a:xfrm>
+            <a:off x="8183880" y="4069080"/>
+            <a:ext cx="3108960" cy="1828800"/>
+          </a:xfrm>
+          <a:prstGeom prst="rect">
+            <a:avLst/>
+          </a:prstGeom>
+          <a:noFill/>
+        </p:spPr>
+        <p:txBody>
+          <a:bodyPr wrap="square">
+            <a:spAutoFit/>
+          </a:bodyPr>
+          <a:lstStyle/>
+          <a:p>
+            <a:pPr>
+              <a:defRPr sz="1400" b="1">
+                <a:solidFill>
+                  <a:srgbClr val="FF6B35"/>
+                </a:solidFill>
+              </a:defRPr>
+            </a:pPr>
+            <a:r>
+              <a:t>6. Masalah Selesai</a:t>
             </a:r>
           </a:p>
           <a:p>
             <a:pPr>
               <a:spcBef>
-                <a:spcPts val="1000"/>
+                <a:spcPts val="200"/>
               </a:spcBef>
-              <a:defRPr sz="1200">
+              <a:defRPr sz="1000" b="1">
+                <a:solidFill>
+                  <a:srgbClr val="64748B"/>
+                </a:solidFill>
+              </a:defRPr>
+            </a:pPr>
+            <a:r>
+              <a:t>Kamar Resmi Pindah</a:t>
+            </a:r>
+          </a:p>
+          <a:p>
+            <a:pPr>
+              <a:spcBef>
+                <a:spcPts val="800"/>
+              </a:spcBef>
+              <a:defRPr sz="1100">
                 <a:solidFill>
                   <a:srgbClr val="1E293B"/>
                 </a:solidFill>
               </a:defRPr>
             </a:pPr>
             <a:r>
-              <a:t>• Kontrol Status Tiket: PENDING -&gt; IN_PROGRESS -&gt; DONE oleh staf operasional lapangan.</a:t>
+              <a:t>Status reservasi diperbarui atomik tanpa komplain berulang.</a:t>
             </a:r>
           </a:p>
         </p:txBody>
@@ -5844,7 +5954,7 @@
         <p:spPr>
           <a:xfrm>
             <a:off x="731520" y="365760"/>
-            <a:ext cx="10515600" cy="365760"/>
+            <a:ext cx="10515600" cy="320040"/>
           </a:xfrm>
           <a:prstGeom prst="rect">
             <a:avLst/>
@@ -5865,7 +5975,7 @@
               </a:defRPr>
             </a:pPr>
             <a:r>
-              <a:t>DESAIN ARSITEKTUR PERANGKAT LUNAK</a:t>
+              <a:t>ACE - INTELLIGENT MOBILE AGENT SYSTEM</a:t>
             </a:r>
           </a:p>
         </p:txBody>
@@ -5900,7 +6010,7 @@
               </a:defRPr>
             </a:pPr>
             <a:r>
-              <a:t>Arsitektur Sistem: Dua Node Logis &amp; Spesialisasi Agen</a:t>
+              <a:t>Dasbor Eksekutif: Metrik Nilai Bisnis &amp; Kalkulator ROI</a:t>
             </a:r>
           </a:p>
         </p:txBody>
@@ -5914,7 +6024,7 @@
         <p:spPr>
           <a:xfrm>
             <a:off x="731520" y="1645920"/>
-            <a:ext cx="5120640" cy="4389120"/>
+            <a:ext cx="2468880" cy="1371600"/>
           </a:xfrm>
           <a:prstGeom prst="roundRect">
             <a:avLst/>
@@ -5958,8 +6068,8 @@
         </p:nvSpPr>
         <p:spPr>
           <a:xfrm>
-            <a:off x="1005840" y="1828800"/>
-            <a:ext cx="4572000" cy="4023360"/>
+            <a:off x="822960" y="1737360"/>
+            <a:ext cx="2286000" cy="1188720"/>
           </a:xfrm>
           <a:prstGeom prst="rect">
             <a:avLst/>
@@ -5973,104 +6083,44 @@
           <a:lstStyle/>
           <a:p>
             <a:pPr>
-              <a:defRPr sz="1800" b="1">
-                <a:solidFill>
-                  <a:srgbClr val="2563EB"/>
-                </a:solidFill>
-              </a:defRPr>
-            </a:pPr>
-            <a:r>
-              <a:t>🏢 Node FRONT_OFFICE</a:t>
+              <a:defRPr sz="1100">
+                <a:solidFill>
+                  <a:srgbClr val="64748B"/>
+                </a:solidFill>
+              </a:defRPr>
+            </a:pPr>
+            <a:r>
+              <a:t>Waktu Resolusi (MTTR)</a:t>
             </a:r>
           </a:p>
           <a:p>
             <a:pPr>
               <a:spcBef>
-                <a:spcPts val="400"/>
+                <a:spcPts val="300"/>
               </a:spcBef>
-              <a:defRPr sz="1100">
-                <a:solidFill>
-                  <a:srgbClr val="64748B"/>
-                </a:solidFill>
-              </a:defRPr>
-            </a:pPr>
-            <a:r>
-              <a:t>Database In-Memory: Data Tamu, Reservasi, Folio, FAQ</a:t>
+              <a:defRPr sz="2000" b="1">
+                <a:solidFill>
+                  <a:srgbClr val="FF6B35"/>
+                </a:solidFill>
+              </a:defRPr>
+            </a:pPr>
+            <a:r>
+              <a:t>&lt; 1 Menit</a:t>
             </a:r>
           </a:p>
           <a:p>
             <a:pPr>
               <a:spcBef>
-                <a:spcPts val="800"/>
+                <a:spcPts val="200"/>
               </a:spcBef>
-              <a:defRPr sz="1200">
-                <a:solidFill>
-                  <a:srgbClr val="1E293B"/>
-                </a:solidFill>
-              </a:defRPr>
-            </a:pPr>
-            <a:r>
-              <a:t>• Scenario Scout: Menerima pesan tamu &amp; membentuk request terstruktur.</a:t>
-            </a:r>
-          </a:p>
-          <a:p>
-            <a:pPr>
-              <a:spcBef>
-                <a:spcPts val="800"/>
-              </a:spcBef>
-              <a:defRPr sz="1200">
-                <a:solidFill>
-                  <a:srgbClr val="1E293B"/>
-                </a:solidFill>
-              </a:defRPr>
-            </a:pPr>
-            <a:r>
-              <a:t>• Orchestrator: Pusat koordinasi, triase policy/ML, &amp; alur kasus.</a:t>
-            </a:r>
-          </a:p>
-          <a:p>
-            <a:pPr>
-              <a:spcBef>
-                <a:spcPts val="800"/>
-              </a:spcBef>
-              <a:defRPr sz="1200">
-                <a:solidFill>
-                  <a:srgbClr val="1E293B"/>
-                </a:solidFill>
-              </a:defRPr>
-            </a:pPr>
-            <a:r>
-              <a:t>• Reservation Agent: Mencari kamar setara &amp; commit perpindahan kamar.</a:t>
-            </a:r>
-          </a:p>
-          <a:p>
-            <a:pPr>
-              <a:spcBef>
-                <a:spcPts val="800"/>
-              </a:spcBef>
-              <a:defRPr sz="1200">
-                <a:solidFill>
-                  <a:srgbClr val="1E293B"/>
-                </a:solidFill>
-              </a:defRPr>
-            </a:pPr>
-            <a:r>
-              <a:t>• Billing Agent: Membaca folio &amp; kalkulasi tagihan kamar/minibar.</a:t>
-            </a:r>
-          </a:p>
-          <a:p>
-            <a:pPr>
-              <a:spcBef>
-                <a:spcPts val="800"/>
-              </a:spcBef>
-              <a:defRPr sz="1200">
-                <a:solidFill>
-                  <a:srgbClr val="1E293B"/>
-                </a:solidFill>
-              </a:defRPr>
-            </a:pPr>
-            <a:r>
-              <a:t>• Concierge Agent: Menjawab FAQ hotel (check-in, check-out, Wi-Fi).</a:t>
+              <a:defRPr sz="900">
+                <a:solidFill>
+                  <a:srgbClr val="10B981"/>
+                </a:solidFill>
+              </a:defRPr>
+            </a:pPr>
+            <a:r>
+              <a:t>97% Lebih Cepat vs 35 Menit Manual</a:t>
             </a:r>
           </a:p>
         </p:txBody>
@@ -6083,8 +6133,8 @@
         </p:nvSpPr>
         <p:spPr>
           <a:xfrm>
-            <a:off x="6309360" y="1645920"/>
-            <a:ext cx="5120640" cy="4389120"/>
+            <a:off x="3474720" y="1645920"/>
+            <a:ext cx="2468880" cy="1371600"/>
           </a:xfrm>
           <a:prstGeom prst="roundRect">
             <a:avLst/>
@@ -6128,8 +6178,8 @@
         </p:nvSpPr>
         <p:spPr>
           <a:xfrm>
-            <a:off x="6583680" y="1828800"/>
-            <a:ext cx="4572000" cy="4023360"/>
+            <a:off x="3566160" y="1737360"/>
+            <a:ext cx="2286000" cy="1188720"/>
           </a:xfrm>
           <a:prstGeom prst="rect">
             <a:avLst/>
@@ -6143,21 +6193,226 @@
           <a:lstStyle/>
           <a:p>
             <a:pPr>
-              <a:defRPr sz="1800" b="1">
+              <a:defRPr sz="1100">
+                <a:solidFill>
+                  <a:srgbClr val="64748B"/>
+                </a:solidFill>
+              </a:defRPr>
+            </a:pPr>
+            <a:r>
+              <a:t>Proteksi Pendapatan</a:t>
+            </a:r>
+          </a:p>
+          <a:p>
+            <a:pPr>
+              <a:spcBef>
+                <a:spcPts val="300"/>
+              </a:spcBef>
+              <a:defRPr sz="2000" b="1">
+                <a:solidFill>
+                  <a:srgbClr val="FF6B35"/>
+                </a:solidFill>
+              </a:defRPr>
+            </a:pPr>
+            <a:r>
+              <a:t>100% Aman</a:t>
+            </a:r>
+          </a:p>
+          <a:p>
+            <a:pPr>
+              <a:spcBef>
+                <a:spcPts val="200"/>
+              </a:spcBef>
+              <a:defRPr sz="900">
                 <a:solidFill>
                   <a:srgbClr val="10B981"/>
                 </a:solidFill>
               </a:defRPr>
             </a:pPr>
             <a:r>
-              <a:t>🔧 Node OPERATIONS</a:t>
+              <a:t>Zero Leakage via Policy Guardrail</a:t>
+            </a:r>
+          </a:p>
+        </p:txBody>
+      </p:sp>
+      <p:sp>
+        <p:nvSpPr>
+          <p:cNvPr id="9" name="Rounded Rectangle 8"/>
+          <p:cNvSpPr/>
+          <p:nvPr/>
+        </p:nvSpPr>
+        <p:spPr>
+          <a:xfrm>
+            <a:off x="6217920" y="1645920"/>
+            <a:ext cx="2468880" cy="1371600"/>
+          </a:xfrm>
+          <a:prstGeom prst="roundRect">
+            <a:avLst/>
+          </a:prstGeom>
+          <a:solidFill>
+            <a:srgbClr val="FFFFFF"/>
+          </a:solidFill>
+          <a:ln w="19050">
+            <a:solidFill>
+              <a:srgbClr val="E2E8F0"/>
+            </a:solidFill>
+          </a:ln>
+        </p:spPr>
+        <p:style>
+          <a:lnRef idx="1">
+            <a:schemeClr val="accent1"/>
+          </a:lnRef>
+          <a:fillRef idx="3">
+            <a:schemeClr val="accent1"/>
+          </a:fillRef>
+          <a:effectRef idx="2">
+            <a:schemeClr val="accent1"/>
+          </a:effectRef>
+          <a:fontRef idx="minor">
+            <a:schemeClr val="lt1"/>
+          </a:fontRef>
+        </p:style>
+        <p:txBody>
+          <a:bodyPr rtlCol="0" anchor="ctr"/>
+          <a:lstStyle/>
+          <a:p>
+            <a:pPr algn="ctr"/>
+          </a:p>
+        </p:txBody>
+      </p:sp>
+      <p:sp>
+        <p:nvSpPr>
+          <p:cNvPr id="10" name="TextBox 9"/>
+          <p:cNvSpPr txBox="1"/>
+          <p:nvPr/>
+        </p:nvSpPr>
+        <p:spPr>
+          <a:xfrm>
+            <a:off x="6309360" y="1737360"/>
+            <a:ext cx="2286000" cy="1188720"/>
+          </a:xfrm>
+          <a:prstGeom prst="rect">
+            <a:avLst/>
+          </a:prstGeom>
+          <a:noFill/>
+        </p:spPr>
+        <p:txBody>
+          <a:bodyPr wrap="square">
+            <a:spAutoFit/>
+          </a:bodyPr>
+          <a:lstStyle/>
+          <a:p>
+            <a:pPr>
+              <a:defRPr sz="1100">
+                <a:solidFill>
+                  <a:srgbClr val="64748B"/>
+                </a:solidFill>
+              </a:defRPr>
+            </a:pPr>
+            <a:r>
+              <a:t>Beban Meja Depan</a:t>
             </a:r>
           </a:p>
           <a:p>
             <a:pPr>
               <a:spcBef>
-                <a:spcPts val="400"/>
+                <a:spcPts val="300"/>
               </a:spcBef>
+              <a:defRPr sz="2000" b="1">
+                <a:solidFill>
+                  <a:srgbClr val="FF6B35"/>
+                </a:solidFill>
+              </a:defRPr>
+            </a:pPr>
+            <a:r>
+              <a:t>-60%</a:t>
+            </a:r>
+          </a:p>
+          <a:p>
+            <a:pPr>
+              <a:spcBef>
+                <a:spcPts val="200"/>
+              </a:spcBef>
+              <a:defRPr sz="900">
+                <a:solidFill>
+                  <a:srgbClr val="10B981"/>
+                </a:solidFill>
+              </a:defRPr>
+            </a:pPr>
+            <a:r>
+              <a:t>Otomasi Keluhan Kamar Rutin</a:t>
+            </a:r>
+          </a:p>
+        </p:txBody>
+      </p:sp>
+      <p:sp>
+        <p:nvSpPr>
+          <p:cNvPr id="11" name="Rounded Rectangle 10"/>
+          <p:cNvSpPr/>
+          <p:nvPr/>
+        </p:nvSpPr>
+        <p:spPr>
+          <a:xfrm>
+            <a:off x="8961120" y="1645920"/>
+            <a:ext cx="2468880" cy="1371600"/>
+          </a:xfrm>
+          <a:prstGeom prst="roundRect">
+            <a:avLst/>
+          </a:prstGeom>
+          <a:solidFill>
+            <a:srgbClr val="FFFFFF"/>
+          </a:solidFill>
+          <a:ln w="19050">
+            <a:solidFill>
+              <a:srgbClr val="E2E8F0"/>
+            </a:solidFill>
+          </a:ln>
+        </p:spPr>
+        <p:style>
+          <a:lnRef idx="1">
+            <a:schemeClr val="accent1"/>
+          </a:lnRef>
+          <a:fillRef idx="3">
+            <a:schemeClr val="accent1"/>
+          </a:fillRef>
+          <a:effectRef idx="2">
+            <a:schemeClr val="accent1"/>
+          </a:effectRef>
+          <a:fontRef idx="minor">
+            <a:schemeClr val="lt1"/>
+          </a:fontRef>
+        </p:style>
+        <p:txBody>
+          <a:bodyPr rtlCol="0" anchor="ctr"/>
+          <a:lstStyle/>
+          <a:p>
+            <a:pPr algn="ctr"/>
+          </a:p>
+        </p:txBody>
+      </p:sp>
+      <p:sp>
+        <p:nvSpPr>
+          <p:cNvPr id="12" name="TextBox 11"/>
+          <p:cNvSpPr txBox="1"/>
+          <p:nvPr/>
+        </p:nvSpPr>
+        <p:spPr>
+          <a:xfrm>
+            <a:off x="9052560" y="1737360"/>
+            <a:ext cx="2286000" cy="1188720"/>
+          </a:xfrm>
+          <a:prstGeom prst="rect">
+            <a:avLst/>
+          </a:prstGeom>
+          <a:noFill/>
+        </p:spPr>
+        <p:txBody>
+          <a:bodyPr wrap="square">
+            <a:spAutoFit/>
+          </a:bodyPr>
+          <a:lstStyle/>
+          <a:p>
+            <a:pPr>
               <a:defRPr sz="1100">
                 <a:solidFill>
                   <a:srgbClr val="64748B"/>
@@ -6165,52 +6420,210 @@
               </a:defRPr>
             </a:pPr>
             <a:r>
-              <a:t>Database In-Memory: Status Kesiapan Fisik Kamar &amp; Tiket Petugas</a:t>
+              <a:t>Kepuasan Tamu (CSAT)</a:t>
             </a:r>
           </a:p>
           <a:p>
             <a:pPr>
               <a:spcBef>
-                <a:spcPts val="1000"/>
+                <a:spcPts val="300"/>
               </a:spcBef>
-              <a:defRPr sz="1200">
+              <a:defRPr sz="2000" b="1">
+                <a:solidFill>
+                  <a:srgbClr val="FF6B35"/>
+                </a:solidFill>
+              </a:defRPr>
+            </a:pPr>
+            <a:r>
+              <a:t>4.9 / 5.0</a:t>
+            </a:r>
+          </a:p>
+          <a:p>
+            <a:pPr>
+              <a:spcBef>
+                <a:spcPts val="200"/>
+              </a:spcBef>
+              <a:defRPr sz="900">
+                <a:solidFill>
+                  <a:srgbClr val="10B981"/>
+                </a:solidFill>
+              </a:defRPr>
+            </a:pPr>
+            <a:r>
+              <a:t>Mencegah Ulasan Bintang 1 Online</a:t>
+            </a:r>
+          </a:p>
+        </p:txBody>
+      </p:sp>
+      <p:sp>
+        <p:nvSpPr>
+          <p:cNvPr id="13" name="Rounded Rectangle 12"/>
+          <p:cNvSpPr/>
+          <p:nvPr/>
+        </p:nvSpPr>
+        <p:spPr>
+          <a:xfrm>
+            <a:off x="731520" y="3291840"/>
+            <a:ext cx="10698480" cy="2834640"/>
+          </a:xfrm>
+          <a:prstGeom prst="roundRect">
+            <a:avLst/>
+          </a:prstGeom>
+          <a:solidFill>
+            <a:srgbClr val="FFFFFF"/>
+          </a:solidFill>
+          <a:ln w="19050">
+            <a:solidFill>
+              <a:srgbClr val="E2E8F0"/>
+            </a:solidFill>
+          </a:ln>
+        </p:spPr>
+        <p:style>
+          <a:lnRef idx="1">
+            <a:schemeClr val="accent1"/>
+          </a:lnRef>
+          <a:fillRef idx="3">
+            <a:schemeClr val="accent1"/>
+          </a:fillRef>
+          <a:effectRef idx="2">
+            <a:schemeClr val="accent1"/>
+          </a:effectRef>
+          <a:fontRef idx="minor">
+            <a:schemeClr val="lt1"/>
+          </a:fontRef>
+        </p:style>
+        <p:txBody>
+          <a:bodyPr rtlCol="0" anchor="ctr"/>
+          <a:lstStyle/>
+          <a:p>
+            <a:pPr algn="ctr"/>
+          </a:p>
+        </p:txBody>
+      </p:sp>
+      <p:sp>
+        <p:nvSpPr>
+          <p:cNvPr id="14" name="TextBox 13"/>
+          <p:cNvSpPr txBox="1"/>
+          <p:nvPr/>
+        </p:nvSpPr>
+        <p:spPr>
+          <a:xfrm>
+            <a:off x="1005840" y="3474720"/>
+            <a:ext cx="10149840" cy="2468880"/>
+          </a:xfrm>
+          <a:prstGeom prst="rect">
+            <a:avLst/>
+          </a:prstGeom>
+          <a:noFill/>
+        </p:spPr>
+        <p:txBody>
+          <a:bodyPr wrap="square">
+            <a:spAutoFit/>
+          </a:bodyPr>
+          <a:lstStyle/>
+          <a:p>
+            <a:pPr>
+              <a:defRPr sz="1600" b="1">
+                <a:solidFill>
+                  <a:srgbClr val="182235"/>
+                </a:solidFill>
+              </a:defRPr>
+            </a:pPr>
+            <a:r>
+              <a:t>🧮 Hasil Simulasi ROI Hotel (Contoh Skala: 150 Kamar &amp; 15 Keluhan/Hari)</a:t>
+            </a:r>
+          </a:p>
+          <a:p>
+            <a:pPr>
+              <a:spcBef>
+                <a:spcPts val="800"/>
+              </a:spcBef>
+              <a:defRPr sz="1200" b="1">
                 <a:solidFill>
                   <a:srgbClr val="1E293B"/>
                 </a:solidFill>
               </a:defRPr>
             </a:pPr>
             <a:r>
-              <a:t>• Operations Agent: Kelola kesiapan fisik kamar, blok maintenance, &amp; tiket staf.</a:t>
+              <a:t>• Waktu Staf Dihemat: </a:t>
+            </a:r>
+            <a:r>
+              <a:rPr b="1">
+                <a:solidFill>
+                  <a:srgbClr val="FF6B35"/>
+                </a:solidFill>
+              </a:rPr>
+              <a:t>360 Jam per Bulan — </a:t>
+            </a:r>
+            <a:r>
+              <a:rPr b="0">
+                <a:solidFill>
+                  <a:srgbClr val="64748B"/>
+                </a:solidFill>
+              </a:rPr>
+              <a:t>Setara dengan produktivitas 2 staf penuh waktu yang dapat dialihkan melayani tamu VIP.</a:t>
             </a:r>
           </a:p>
           <a:p>
             <a:pPr>
               <a:spcBef>
-                <a:spcPts val="1000"/>
+                <a:spcPts val="800"/>
               </a:spcBef>
-              <a:defRPr sz="1200">
+              <a:defRPr sz="1200" b="1">
                 <a:solidFill>
                   <a:srgbClr val="1E293B"/>
                 </a:solidFill>
               </a:defRPr>
             </a:pPr>
             <a:r>
-              <a:t>• Mobile Investigator (MA-001): Agen yang bermigrasi dari Front Office ke Operations untuk menginspeksi kesiapan kamar langsung di sumber data.</a:t>
+              <a:t>• Kebocoran Biaya Dicegah: </a:t>
+            </a:r>
+            <a:r>
+              <a:rPr b="1">
+                <a:solidFill>
+                  <a:srgbClr val="FF6B35"/>
+                </a:solidFill>
+              </a:rPr>
+              <a:t>Rp 11.250.000 per Bulan — </a:t>
+            </a:r>
+            <a:r>
+              <a:rPr b="0">
+                <a:solidFill>
+                  <a:srgbClr val="64748B"/>
+                </a:solidFill>
+              </a:rPr>
+              <a:t>Dihitung dari pencegahan 45 kasus permohonan upgrade liar (selisih tarif Rp250.000/kamar).</a:t>
             </a:r>
           </a:p>
           <a:p>
             <a:pPr>
               <a:spcBef>
-                <a:spcPts val="2400"/>
+                <a:spcPts val="800"/>
               </a:spcBef>
-              <a:defRPr sz="1100" b="1">
+              <a:defRPr sz="1200" b="1">
+                <a:solidFill>
+                  <a:srgbClr val="1E293B"/>
+                </a:solidFill>
+              </a:defRPr>
+            </a:pPr>
+            <a:r>
+              <a:t>• Pencegahan Komplain Berulang: </a:t>
+            </a:r>
+            <a:r>
+              <a:rPr b="1">
                 <a:solidFill>
                   <a:srgbClr val="FF6B35"/>
                 </a:solidFill>
-              </a:defRPr>
-            </a:pPr>
-            <a:r>
-              <a:t>🔒 Hak Akses Data: Agen hanya berhak membaca data sesuai hak akses node aktif.</a:t>
+              </a:rPr>
+              <a:t>360 Tamu per Bulan — </a:t>
+            </a:r>
+            <a:r>
+              <a:rPr b="0">
+                <a:solidFill>
+                  <a:srgbClr val="64748B"/>
+                </a:solidFill>
+              </a:rPr>
+              <a:t>Tamu menerima solusi kamar bersih dalam &lt; 1 menit langsung di smartphone mereka.</a:t>
             </a:r>
           </a:p>
         </p:txBody>
@@ -6285,7 +6698,7 @@
         <p:spPr>
           <a:xfrm>
             <a:off x="731520" y="365760"/>
-            <a:ext cx="10515600" cy="365760"/>
+            <a:ext cx="10515600" cy="320040"/>
           </a:xfrm>
           <a:prstGeom prst="rect">
             <a:avLst/>
@@ -6306,7 +6719,7 @@
               </a:defRPr>
             </a:pPr>
             <a:r>
-              <a:t>MEKANISME TEKNIS MIGRASI</a:t>
+              <a:t>ACE - INTELLIGENT MOBILE AGENT SYSTEM</a:t>
             </a:r>
           </a:p>
         </p:txBody>
@@ -6341,7 +6754,7 @@
               </a:defRPr>
             </a:pPr>
             <a:r>
-              <a:t>Protokol Migrasi State Agen &amp; Jaminan Keamanan SHA-256</a:t>
+              <a:t>Arsitektur Sistem: Dua Node Logis &amp; Spesialisasi Agen</a:t>
             </a:r>
           </a:p>
         </p:txBody>
@@ -6355,7 +6768,7 @@
         <p:spPr>
           <a:xfrm>
             <a:off x="731520" y="1645920"/>
-            <a:ext cx="2468880" cy="4389120"/>
+            <a:ext cx="5120640" cy="4480560"/>
           </a:xfrm>
           <a:prstGeom prst="roundRect">
             <a:avLst/>
@@ -6399,8 +6812,8 @@
         </p:nvSpPr>
         <p:spPr>
           <a:xfrm>
-            <a:off x="868680" y="1828800"/>
-            <a:ext cx="2194560" cy="4023360"/>
+            <a:off x="1005840" y="1828800"/>
+            <a:ext cx="4572000" cy="4114800"/>
           </a:xfrm>
           <a:prstGeom prst="rect">
             <a:avLst/>
@@ -6414,20 +6827,35 @@
           <a:lstStyle/>
           <a:p>
             <a:pPr>
-              <a:defRPr sz="1500" b="1">
-                <a:solidFill>
-                  <a:srgbClr val="FF6B35"/>
-                </a:solidFill>
-              </a:defRPr>
-            </a:pPr>
-            <a:r>
-              <a:t>1. PREPARE</a:t>
+              <a:defRPr sz="1800" b="1">
+                <a:solidFill>
+                  <a:srgbClr val="2563EB"/>
+                </a:solidFill>
+              </a:defRPr>
+            </a:pPr>
+            <a:r>
+              <a:t>🏢 Node FRONT_OFFICE</a:t>
             </a:r>
           </a:p>
           <a:p>
             <a:pPr>
               <a:spcBef>
-                <a:spcPts val="1200"/>
+                <a:spcPts val="400"/>
+              </a:spcBef>
+              <a:defRPr sz="1100">
+                <a:solidFill>
+                  <a:srgbClr val="64748B"/>
+                </a:solidFill>
+              </a:defRPr>
+            </a:pPr>
+            <a:r>
+              <a:t>Database In-Memory: Data Tamu, Reservasi, Folio Tagihan, FAQ</a:t>
+            </a:r>
+          </a:p>
+          <a:p>
+            <a:pPr>
+              <a:spcBef>
+                <a:spcPts val="800"/>
               </a:spcBef>
               <a:defRPr sz="1200">
                 <a:solidFill>
@@ -6436,7 +6864,67 @@
               </a:defRPr>
             </a:pPr>
             <a:r>
-              <a:t>Serialisasi state agen (tujuan, kandidat kamar, kriteria) menjadi Checkpoint JSON kanonik UTF-8. Hash SHA-256 digenerate.</a:t>
+              <a:t>• Scenario Scout: Membaca pesan tamu &amp; membuat tiket terstruktur.</a:t>
+            </a:r>
+          </a:p>
+          <a:p>
+            <a:pPr>
+              <a:spcBef>
+                <a:spcPts val="800"/>
+              </a:spcBef>
+              <a:defRPr sz="1200">
+                <a:solidFill>
+                  <a:srgbClr val="1E293B"/>
+                </a:solidFill>
+              </a:defRPr>
+            </a:pPr>
+            <a:r>
+              <a:t>• Orchestrator: Triase keluhan, klasifikasi risiko ML, &amp; koordinasi alur.</a:t>
+            </a:r>
+          </a:p>
+          <a:p>
+            <a:pPr>
+              <a:spcBef>
+                <a:spcPts val="800"/>
+              </a:spcBef>
+              <a:defRPr sz="1200">
+                <a:solidFill>
+                  <a:srgbClr val="1E293B"/>
+                </a:solidFill>
+              </a:defRPr>
+            </a:pPr>
+            <a:r>
+              <a:t>• Reservation Agent: Mencari kandidat kamar &amp; eksekusi commit mutasi.</a:t>
+            </a:r>
+          </a:p>
+          <a:p>
+            <a:pPr>
+              <a:spcBef>
+                <a:spcPts val="800"/>
+              </a:spcBef>
+              <a:defRPr sz="1200">
+                <a:solidFill>
+                  <a:srgbClr val="1E293B"/>
+                </a:solidFill>
+              </a:defRPr>
+            </a:pPr>
+            <a:r>
+              <a:t>• Billing Agent: Membaca folio tagihan &amp; kalkulasi biaya minibar.</a:t>
+            </a:r>
+          </a:p>
+          <a:p>
+            <a:pPr>
+              <a:spcBef>
+                <a:spcPts val="800"/>
+              </a:spcBef>
+              <a:defRPr sz="1200">
+                <a:solidFill>
+                  <a:srgbClr val="1E293B"/>
+                </a:solidFill>
+              </a:defRPr>
+            </a:pPr>
+            <a:r>
+              <a:t>• Concierge Agent: Menjawab FAQ umum hotel (check-in, check-out, Wi-Fi).</a:t>
             </a:r>
           </a:p>
         </p:txBody>
@@ -6449,8 +6937,8 @@
         </p:nvSpPr>
         <p:spPr>
           <a:xfrm>
-            <a:off x="3474720" y="1645920"/>
-            <a:ext cx="2468880" cy="4389120"/>
+            <a:off x="6309360" y="1645920"/>
+            <a:ext cx="5120640" cy="4480560"/>
           </a:xfrm>
           <a:prstGeom prst="roundRect">
             <a:avLst/>
@@ -6494,8 +6982,8 @@
         </p:nvSpPr>
         <p:spPr>
           <a:xfrm>
-            <a:off x="3611880" y="1828800"/>
-            <a:ext cx="2194560" cy="4023360"/>
+            <a:off x="6583680" y="1828800"/>
+            <a:ext cx="4572000" cy="4114800"/>
           </a:xfrm>
           <a:prstGeom prst="rect">
             <a:avLst/>
@@ -6509,20 +6997,35 @@
           <a:lstStyle/>
           <a:p>
             <a:pPr>
-              <a:defRPr sz="1500" b="1">
-                <a:solidFill>
-                  <a:srgbClr val="FF6B35"/>
-                </a:solidFill>
-              </a:defRPr>
-            </a:pPr>
-            <a:r>
-              <a:t>2. DEPART</a:t>
+              <a:defRPr sz="1800" b="1">
+                <a:solidFill>
+                  <a:srgbClr val="10B981"/>
+                </a:solidFill>
+              </a:defRPr>
+            </a:pPr>
+            <a:r>
+              <a:t>🔧 Node OPERATIONS</a:t>
             </a:r>
           </a:p>
           <a:p>
             <a:pPr>
               <a:spcBef>
-                <a:spcPts val="1200"/>
+                <a:spcPts val="400"/>
+              </a:spcBef>
+              <a:defRPr sz="1100">
+                <a:solidFill>
+                  <a:srgbClr val="64748B"/>
+                </a:solidFill>
+              </a:defRPr>
+            </a:pPr>
+            <a:r>
+              <a:t>Database In-Memory: Kesiapan Fisik Kamar &amp; Tiket Petugas</a:t>
+            </a:r>
+          </a:p>
+          <a:p>
+            <a:pPr>
+              <a:spcBef>
+                <a:spcPts val="1000"/>
               </a:spcBef>
               <a:defRPr sz="1200">
                 <a:solidFill>
@@ -6531,93 +7034,13 @@
               </a:defRPr>
             </a:pPr>
             <a:r>
-              <a:t>Instance agen di node asal ditutup dan diarsipkan. Instance aktif = 0; agen hanya berada di jalur transit.</a:t>
-            </a:r>
-          </a:p>
-        </p:txBody>
-      </p:sp>
-      <p:sp>
-        <p:nvSpPr>
-          <p:cNvPr id="9" name="Rounded Rectangle 8"/>
-          <p:cNvSpPr/>
-          <p:nvPr/>
-        </p:nvSpPr>
-        <p:spPr>
-          <a:xfrm>
-            <a:off x="6217920" y="1645920"/>
-            <a:ext cx="2468880" cy="4389120"/>
-          </a:xfrm>
-          <a:prstGeom prst="roundRect">
-            <a:avLst/>
-          </a:prstGeom>
-          <a:solidFill>
-            <a:srgbClr val="FFFFFF"/>
-          </a:solidFill>
-          <a:ln w="19050">
-            <a:solidFill>
-              <a:srgbClr val="E2E8F0"/>
-            </a:solidFill>
-          </a:ln>
-        </p:spPr>
-        <p:style>
-          <a:lnRef idx="1">
-            <a:schemeClr val="accent1"/>
-          </a:lnRef>
-          <a:fillRef idx="3">
-            <a:schemeClr val="accent1"/>
-          </a:fillRef>
-          <a:effectRef idx="2">
-            <a:schemeClr val="accent1"/>
-          </a:effectRef>
-          <a:fontRef idx="minor">
-            <a:schemeClr val="lt1"/>
-          </a:fontRef>
-        </p:style>
-        <p:txBody>
-          <a:bodyPr rtlCol="0" anchor="ctr"/>
-          <a:lstStyle/>
-          <a:p>
-            <a:pPr algn="ctr"/>
-          </a:p>
-        </p:txBody>
-      </p:sp>
-      <p:sp>
-        <p:nvSpPr>
-          <p:cNvPr id="10" name="TextBox 9"/>
-          <p:cNvSpPr txBox="1"/>
-          <p:nvPr/>
-        </p:nvSpPr>
-        <p:spPr>
-          <a:xfrm>
-            <a:off x="6355080" y="1828800"/>
-            <a:ext cx="2194560" cy="4023360"/>
-          </a:xfrm>
-          <a:prstGeom prst="rect">
-            <a:avLst/>
-          </a:prstGeom>
-          <a:noFill/>
-        </p:spPr>
-        <p:txBody>
-          <a:bodyPr wrap="square">
-            <a:spAutoFit/>
-          </a:bodyPr>
-          <a:lstStyle/>
-          <a:p>
-            <a:pPr>
-              <a:defRPr sz="1500" b="1">
-                <a:solidFill>
-                  <a:srgbClr val="FF6B35"/>
-                </a:solidFill>
-              </a:defRPr>
-            </a:pPr>
-            <a:r>
-              <a:t>3. ARRIVE</a:t>
+              <a:t>• Operations Agent: Koordinator pembersihan kamar &amp; tiket kerja staf fisik.</a:t>
             </a:r>
           </a:p>
           <a:p>
             <a:pPr>
               <a:spcBef>
-                <a:spcPts val="1200"/>
+                <a:spcPts val="1000"/>
               </a:spcBef>
               <a:defRPr sz="1200">
                 <a:solidFill>
@@ -6626,102 +7049,22 @@
               </a:defRPr>
             </a:pPr>
             <a:r>
-              <a:t>Instance baru dibuat di node tujuan dari checkpoint. Integritas hash SHA-256 &amp; skema divalidasi sebelum aktivasi.</a:t>
-            </a:r>
-          </a:p>
-        </p:txBody>
-      </p:sp>
-      <p:sp>
-        <p:nvSpPr>
-          <p:cNvPr id="11" name="Rounded Rectangle 10"/>
-          <p:cNvSpPr/>
-          <p:nvPr/>
-        </p:nvSpPr>
-        <p:spPr>
-          <a:xfrm>
-            <a:off x="8961120" y="1645920"/>
-            <a:ext cx="2468880" cy="4389120"/>
-          </a:xfrm>
-          <a:prstGeom prst="roundRect">
-            <a:avLst/>
-          </a:prstGeom>
-          <a:solidFill>
-            <a:srgbClr val="FFFFFF"/>
-          </a:solidFill>
-          <a:ln w="19050">
-            <a:solidFill>
-              <a:srgbClr val="E2E8F0"/>
-            </a:solidFill>
-          </a:ln>
-        </p:spPr>
-        <p:style>
-          <a:lnRef idx="1">
-            <a:schemeClr val="accent1"/>
-          </a:lnRef>
-          <a:fillRef idx="3">
-            <a:schemeClr val="accent1"/>
-          </a:fillRef>
-          <a:effectRef idx="2">
-            <a:schemeClr val="accent1"/>
-          </a:effectRef>
-          <a:fontRef idx="minor">
-            <a:schemeClr val="lt1"/>
-          </a:fontRef>
-        </p:style>
-        <p:txBody>
-          <a:bodyPr rtlCol="0" anchor="ctr"/>
-          <a:lstStyle/>
-          <a:p>
-            <a:pPr algn="ctr"/>
-          </a:p>
-        </p:txBody>
-      </p:sp>
-      <p:sp>
-        <p:nvSpPr>
-          <p:cNvPr id="12" name="TextBox 11"/>
-          <p:cNvSpPr txBox="1"/>
-          <p:nvPr/>
-        </p:nvSpPr>
-        <p:spPr>
-          <a:xfrm>
-            <a:off x="9098280" y="1828800"/>
-            <a:ext cx="2194560" cy="4023360"/>
-          </a:xfrm>
-          <a:prstGeom prst="rect">
-            <a:avLst/>
-          </a:prstGeom>
-          <a:noFill/>
-        </p:spPr>
-        <p:txBody>
-          <a:bodyPr wrap="square">
-            <a:spAutoFit/>
-          </a:bodyPr>
-          <a:lstStyle/>
-          <a:p>
-            <a:pPr>
-              <a:defRPr sz="1500" b="1">
+              <a:t>• Mobile Investigator (MA-001): Agen yang bermigrasi dari Front Office ke Operations untuk menginspeksi kesiapan kamar langsung di sumber data.</a:t>
+            </a:r>
+          </a:p>
+          <a:p>
+            <a:pPr>
+              <a:spcBef>
+                <a:spcPts val="2200"/>
+              </a:spcBef>
+              <a:defRPr sz="1100" b="1">
                 <a:solidFill>
                   <a:srgbClr val="FF6B35"/>
                 </a:solidFill>
               </a:defRPr>
             </a:pPr>
             <a:r>
-              <a:t>4. ROLLBACK</a:t>
-            </a:r>
-          </a:p>
-          <a:p>
-            <a:pPr>
-              <a:spcBef>
-                <a:spcPts val="1200"/>
-              </a:spcBef>
-              <a:defRPr sz="1200">
-                <a:solidFill>
-                  <a:srgbClr val="1E293B"/>
-                </a:solidFill>
-              </a:defRPr>
-            </a:pPr>
-            <a:r>
-              <a:t>Jika terjadi anomali (hash rusak, skema tidak cocok), mekanisme rollback memulihkan agen ke node asal secara aman.</a:t>
+              <a:t>✈️ Siklus Migrasi State: PREPARE → DEPART → ARRIVE (SHA-256 Validated)</a:t>
             </a:r>
           </a:p>
         </p:txBody>
@@ -6796,7 +7139,7 @@
         <p:spPr>
           <a:xfrm>
             <a:off x="731520" y="365760"/>
-            <a:ext cx="10515600" cy="365760"/>
+            <a:ext cx="10515600" cy="320040"/>
           </a:xfrm>
           <a:prstGeom prst="rect">
             <a:avLst/>
@@ -6817,7 +7160,7 @@
               </a:defRPr>
             </a:pPr>
             <a:r>
-              <a:t>ALAT PENGUJIAN &amp; TELEMETRI</a:t>
+              <a:t>ACE - INTELLIGENT MOBILE AGENT SYSTEM</a:t>
             </a:r>
           </a:p>
         </p:txBody>
@@ -6852,7 +7195,7 @@
               </a:defRPr>
             </a:pPr>
             <a:r>
-              <a:t>Fitur Mode Teknikal: Step Simulator, Observabilitas, &amp; DB Audit</a:t>
+              <a:t>Evaluasi Komparatif: Mobile Agent vs Static Agent</a:t>
             </a:r>
           </a:p>
         </p:txBody>
@@ -6866,7 +7209,7 @@
         <p:spPr>
           <a:xfrm>
             <a:off x="731520" y="1645920"/>
-            <a:ext cx="3383280" cy="4389120"/>
+            <a:ext cx="10698480" cy="4480560"/>
           </a:xfrm>
           <a:prstGeom prst="roundRect">
             <a:avLst/>
@@ -6910,8 +7253,8 @@
         </p:nvSpPr>
         <p:spPr>
           <a:xfrm>
-            <a:off x="914400" y="1828800"/>
-            <a:ext cx="3017520" cy="4023360"/>
+            <a:off x="1005840" y="1828800"/>
+            <a:ext cx="10149840" cy="4114800"/>
           </a:xfrm>
           <a:prstGeom prst="rect">
             <a:avLst/>
@@ -6925,271 +7268,138 @@
           <a:lstStyle/>
           <a:p>
             <a:pPr>
-              <a:defRPr sz="1600" b="1">
+              <a:defRPr sz="1700" b="1">
                 <a:solidFill>
                   <a:srgbClr val="182235"/>
                 </a:solidFill>
               </a:defRPr>
             </a:pPr>
             <a:r>
-              <a:t>⚡ Lab Step Simulator</a:t>
+              <a:t>📊 Perbandingan Dua Jalur Arsitektur pada Skenario Identik (S01 &amp; S02)</a:t>
             </a:r>
           </a:p>
           <a:p>
             <a:pPr>
               <a:spcBef>
-                <a:spcPts val="1400"/>
+                <a:spcPts val="1000"/>
               </a:spcBef>
-              <a:defRPr sz="1200">
-                <a:solidFill>
-                  <a:srgbClr val="1E293B"/>
-                </a:solidFill>
-              </a:defRPr>
-            </a:pPr>
-            <a:r>
-              <a:t>Kontrol Granular Mesin Simulasi:</a:t>
-            </a:r>
-            <a:br/>
-            <a:r>
-              <a:t>• Menjalankan simulasi langkah demi langkah (Step Engine)</a:t>
-            </a:r>
-            <a:br/>
-            <a:r>
-              <a:t>• Memeriksa antrean pesan (FIFO queue deque)</a:t>
-            </a:r>
-            <a:br/>
-            <a:r>
-              <a:t>• Memantau transisi state agen (CREATED -&gt; ACTIVE -&gt; IN_TRANSIT -&gt; DONE)</a:t>
-            </a:r>
-            <a:br/>
-            <a:r>
-              <a:t>• Verifikasi titik henti otonomi (PAUSED statuses)</a:t>
-            </a:r>
-          </a:p>
-        </p:txBody>
-      </p:sp>
-      <p:sp>
-        <p:nvSpPr>
-          <p:cNvPr id="7" name="Rounded Rectangle 6"/>
-          <p:cNvSpPr/>
-          <p:nvPr/>
-        </p:nvSpPr>
-        <p:spPr>
-          <a:xfrm>
-            <a:off x="4389120" y="1645920"/>
-            <a:ext cx="3383280" cy="4389120"/>
-          </a:xfrm>
-          <a:prstGeom prst="roundRect">
-            <a:avLst/>
-          </a:prstGeom>
-          <a:solidFill>
-            <a:srgbClr val="FFFFFF"/>
-          </a:solidFill>
-          <a:ln w="19050">
-            <a:solidFill>
-              <a:srgbClr val="E2E8F0"/>
-            </a:solidFill>
-          </a:ln>
-        </p:spPr>
-        <p:style>
-          <a:lnRef idx="1">
-            <a:schemeClr val="accent1"/>
-          </a:lnRef>
-          <a:fillRef idx="3">
-            <a:schemeClr val="accent1"/>
-          </a:fillRef>
-          <a:effectRef idx="2">
-            <a:schemeClr val="accent1"/>
-          </a:effectRef>
-          <a:fontRef idx="minor">
-            <a:schemeClr val="lt1"/>
-          </a:fontRef>
-        </p:style>
-        <p:txBody>
-          <a:bodyPr rtlCol="0" anchor="ctr"/>
-          <a:lstStyle/>
-          <a:p>
-            <a:pPr algn="ctr"/>
-          </a:p>
-        </p:txBody>
-      </p:sp>
-      <p:sp>
-        <p:nvSpPr>
-          <p:cNvPr id="8" name="TextBox 7"/>
-          <p:cNvSpPr txBox="1"/>
-          <p:nvPr/>
-        </p:nvSpPr>
-        <p:spPr>
-          <a:xfrm>
-            <a:off x="4572000" y="1828800"/>
-            <a:ext cx="3017520" cy="4023360"/>
-          </a:xfrm>
-          <a:prstGeom prst="rect">
-            <a:avLst/>
-          </a:prstGeom>
-          <a:noFill/>
-        </p:spPr>
-        <p:txBody>
-          <a:bodyPr wrap="square">
-            <a:spAutoFit/>
-          </a:bodyPr>
-          <a:lstStyle/>
-          <a:p>
-            <a:pPr>
-              <a:defRPr sz="1600" b="1">
+              <a:defRPr sz="1200" b="1">
                 <a:solidFill>
                   <a:srgbClr val="182235"/>
                 </a:solidFill>
               </a:defRPr>
             </a:pPr>
             <a:r>
-              <a:t>🔍 Observabilitas &amp; Audit DB</a:t>
+              <a:t>• Lokasi Eksekusi Evaluasi: </a:t>
+            </a:r>
+            <a:r>
+              <a:rPr b="0">
+                <a:solidFill>
+                  <a:srgbClr val="FF6B35"/>
+                </a:solidFill>
+              </a:rPr>
+              <a:t>[Mobile] Instance agen bermigrasi ke node OPERATIONS dan menjalankan kernel inspeksi lokal.  vs  </a:t>
+            </a:r>
+            <a:r>
+              <a:rPr b="0">
+                <a:solidFill>
+                  <a:srgbClr val="64748B"/>
+                </a:solidFill>
+              </a:rPr>
+              <a:t>[Static] Agen tetap berada di FRONT_OFFICE dan mengirim request RPC berulang.</a:t>
             </a:r>
           </a:p>
           <a:p>
             <a:pPr>
               <a:spcBef>
-                <a:spcPts val="1400"/>
+                <a:spcPts val="1000"/>
               </a:spcBef>
-              <a:defRPr sz="1200">
-                <a:solidFill>
-                  <a:srgbClr val="1E293B"/>
-                </a:solidFill>
-              </a:defRPr>
-            </a:pPr>
-            <a:r>
-              <a:t>Telemetri Mendalam &amp; Integritas:</a:t>
-            </a:r>
-            <a:br/>
-            <a:r>
-              <a:t>• Event Audit Trail: Urutan sekuensial seluruh event sistem</a:t>
-            </a:r>
-            <a:br/>
-            <a:r>
-              <a:t>• Tabel Pesan Antar-Node: Ukuran byte payload kanonik UTF-8</a:t>
-            </a:r>
-            <a:br/>
-            <a:r>
-              <a:t>• Verifikasi Hash SHA-256: Bukti checkpoint tidak dimanipulasi</a:t>
-            </a:r>
-            <a:br/>
-            <a:r>
-              <a:t>• In-Memory SQLite Dump: Inspeksi isi database Front Office &amp; Operations</a:t>
-            </a:r>
-            <a:br/>
-            <a:r>
-              <a:t>• Ekspor JSON: Unduh log audit lengkap untuk kebutuhan pengujian</a:t>
-            </a:r>
-          </a:p>
-        </p:txBody>
-      </p:sp>
-      <p:sp>
-        <p:nvSpPr>
-          <p:cNvPr id="9" name="Rounded Rectangle 8"/>
-          <p:cNvSpPr/>
-          <p:nvPr/>
-        </p:nvSpPr>
-        <p:spPr>
-          <a:xfrm>
-            <a:off x="8046720" y="1645920"/>
-            <a:ext cx="3383280" cy="4389120"/>
-          </a:xfrm>
-          <a:prstGeom prst="roundRect">
-            <a:avLst/>
-          </a:prstGeom>
-          <a:solidFill>
-            <a:srgbClr val="FFFFFF"/>
-          </a:solidFill>
-          <a:ln w="19050">
-            <a:solidFill>
-              <a:srgbClr val="E2E8F0"/>
-            </a:solidFill>
-          </a:ln>
-        </p:spPr>
-        <p:style>
-          <a:lnRef idx="1">
-            <a:schemeClr val="accent1"/>
-          </a:lnRef>
-          <a:fillRef idx="3">
-            <a:schemeClr val="accent1"/>
-          </a:fillRef>
-          <a:effectRef idx="2">
-            <a:schemeClr val="accent1"/>
-          </a:effectRef>
-          <a:fontRef idx="minor">
-            <a:schemeClr val="lt1"/>
-          </a:fontRef>
-        </p:style>
-        <p:txBody>
-          <a:bodyPr rtlCol="0" anchor="ctr"/>
-          <a:lstStyle/>
-          <a:p>
-            <a:pPr algn="ctr"/>
-          </a:p>
-        </p:txBody>
-      </p:sp>
-      <p:sp>
-        <p:nvSpPr>
-          <p:cNvPr id="10" name="TextBox 9"/>
-          <p:cNvSpPr txBox="1"/>
-          <p:nvPr/>
-        </p:nvSpPr>
-        <p:spPr>
-          <a:xfrm>
-            <a:off x="8229600" y="1828800"/>
-            <a:ext cx="3017520" cy="4023360"/>
-          </a:xfrm>
-          <a:prstGeom prst="rect">
-            <a:avLst/>
-          </a:prstGeom>
-          <a:noFill/>
-        </p:spPr>
-        <p:txBody>
-          <a:bodyPr wrap="square">
-            <a:spAutoFit/>
-          </a:bodyPr>
-          <a:lstStyle/>
-          <a:p>
-            <a:pPr>
-              <a:defRPr sz="1600" b="1">
+              <a:defRPr sz="1200" b="1">
                 <a:solidFill>
                   <a:srgbClr val="182235"/>
                 </a:solidFill>
               </a:defRPr>
             </a:pPr>
             <a:r>
-              <a:t>🛡️ Penolakan Serangan &amp; Invarian</a:t>
+              <a:t>• Efisiensi Komunikasi: </a:t>
+            </a:r>
+            <a:r>
+              <a:rPr b="0">
+                <a:solidFill>
+                  <a:srgbClr val="FF6B35"/>
+                </a:solidFill>
+              </a:rPr>
+              <a:t>[Mobile] Hanya 1 kali pengiriman koper state JSON kanonik.  vs  </a:t>
+            </a:r>
+            <a:r>
+              <a:rPr b="0">
+                <a:solidFill>
+                  <a:srgbClr val="64748B"/>
+                </a:solidFill>
+              </a:rPr>
+              <a:t>[Static] Mengandalkan pertukaran pesan request/response multi-hop.</a:t>
             </a:r>
           </a:p>
           <a:p>
             <a:pPr>
               <a:spcBef>
-                <a:spcPts val="1400"/>
+                <a:spcPts val="1000"/>
               </a:spcBef>
-              <a:defRPr sz="1200">
-                <a:solidFill>
-                  <a:srgbClr val="1E293B"/>
-                </a:solidFill>
-              </a:defRPr>
-            </a:pPr>
-            <a:r>
-              <a:t>Pertahanan Arsitektur Komputasi:</a:t>
-            </a:r>
-            <a:br/>
-            <a:r>
-              <a:t>• Mencegah Replay Attack &amp; Duplicate Side Effects</a:t>
-            </a:r>
-            <a:br/>
-            <a:r>
-              <a:t>• Menolak modifikasi ilegal field runtime agen</a:t>
-            </a:r>
-            <a:br/>
-            <a:r>
-              <a:t>• Rollback instan jika node tujuan mati/tidak aktif</a:t>
-            </a:r>
-            <a:br/>
-            <a:r>
-              <a:t>• Menjaga kontinuitas identitas agen MA-001</a:t>
+              <a:defRPr sz="1200" b="1">
+                <a:solidFill>
+                  <a:srgbClr val="182235"/>
+                </a:solidFill>
+              </a:defRPr>
+            </a:pPr>
+            <a:r>
+              <a:t>• Privasi &amp; Keamanan Data: </a:t>
+            </a:r>
+            <a:r>
+              <a:rPr b="0">
+                <a:solidFill>
+                  <a:srgbClr val="FF6B35"/>
+                </a:solidFill>
+              </a:rPr>
+              <a:t>[Mobile] Data audit operasional internal tetap berada di node lokal (Zero Data Leakage).  vs  </a:t>
+            </a:r>
+            <a:r>
+              <a:rPr b="0">
+                <a:solidFill>
+                  <a:srgbClr val="64748B"/>
+                </a:solidFill>
+              </a:rPr>
+              <a:t>[Static] Data operasional harus dikirim melintasi batas jaringan Front Office.</a:t>
+            </a:r>
+          </a:p>
+          <a:p>
+            <a:pPr>
+              <a:spcBef>
+                <a:spcPts val="1000"/>
+              </a:spcBef>
+              <a:defRPr sz="1200" b="1">
+                <a:solidFill>
+                  <a:srgbClr val="182235"/>
+                </a:solidFill>
+              </a:defRPr>
+            </a:pPr>
+            <a:r>
+              <a:t>• Kesetaraan Hasil Bisnis: </a:t>
+            </a:r>
+            <a:r>
+              <a:rPr b="0">
+                <a:solidFill>
+                  <a:srgbClr val="FF6B35"/>
+                </a:solidFill>
+              </a:rPr>
+              <a:t>[Mobile] Keputusan kamar (R103) dan tarif akhir 100% identik.  vs  </a:t>
+            </a:r>
+            <a:r>
+              <a:rPr b="0">
+                <a:solidFill>
+                  <a:srgbClr val="64748B"/>
+                </a:solidFill>
+              </a:rPr>
+              <a:t>[Static] Keputusan kamar (R103) dan tarif akhir 100% identik.</a:t>
             </a:r>
           </a:p>
         </p:txBody>
@@ -7264,7 +7474,7 @@
         <p:spPr>
           <a:xfrm>
             <a:off x="731520" y="365760"/>
-            <a:ext cx="10515600" cy="365760"/>
+            <a:ext cx="10515600" cy="320040"/>
           </a:xfrm>
           <a:prstGeom prst="rect">
             <a:avLst/>
@@ -7285,7 +7495,7 @@
               </a:defRPr>
             </a:pPr>
             <a:r>
-              <a:t>CAKUPAN KASUS BISNIS</a:t>
+              <a:t>ACE - INTELLIGENT MOBILE AGENT SYSTEM</a:t>
             </a:r>
           </a:p>
         </p:txBody>
@@ -7320,7 +7530,7 @@
               </a:defRPr>
             </a:pPr>
             <a:r>
-              <a:t>9 Skenario Pengujian Realistis &amp; Otomatisasi 1-Klik</a:t>
+              <a:t>Pengujian Otomatis &amp; Keandalan Sistem (68/68 Passed)</a:t>
             </a:r>
           </a:p>
         </p:txBody>
@@ -7334,7 +7544,7 @@
         <p:spPr>
           <a:xfrm>
             <a:off x="731520" y="1645920"/>
-            <a:ext cx="3383280" cy="1280160"/>
+            <a:ext cx="5120640" cy="2103120"/>
           </a:xfrm>
           <a:prstGeom prst="roundRect">
             <a:avLst/>
@@ -7378,8 +7588,8 @@
         </p:nvSpPr>
         <p:spPr>
           <a:xfrm>
-            <a:off x="868680" y="1737360"/>
-            <a:ext cx="3108960" cy="1097280"/>
+            <a:off x="914400" y="1783080"/>
+            <a:ext cx="4754880" cy="1828800"/>
           </a:xfrm>
           <a:prstGeom prst="rect">
             <a:avLst/>
@@ -7393,14 +7603,14 @@
           <a:lstStyle/>
           <a:p>
             <a:pPr>
-              <a:defRPr sz="1200" b="1">
-                <a:solidFill>
-                  <a:srgbClr val="FF6B35"/>
-                </a:solidFill>
-              </a:defRPr>
-            </a:pPr>
-            <a:r>
-              <a:t>S01: AC Rusak — Kamar Setara</a:t>
+              <a:defRPr sz="1500" b="1">
+                <a:solidFill>
+                  <a:srgbClr val="182235"/>
+                </a:solidFill>
+              </a:defRPr>
+            </a:pPr>
+            <a:r>
+              <a:t>Integritas Migrasi State</a:t>
             </a:r>
           </a:p>
           <a:p>
@@ -7408,14 +7618,29 @@
               <a:spcBef>
                 <a:spcPts val="300"/>
               </a:spcBef>
-              <a:defRPr sz="1000">
+              <a:defRPr sz="1100" b="1">
+                <a:solidFill>
+                  <a:srgbClr val="10B981"/>
+                </a:solidFill>
+              </a:defRPr>
+            </a:pPr>
+            <a:r>
+              <a:t>Status: 100% Lulus</a:t>
+            </a:r>
+          </a:p>
+          <a:p>
+            <a:pPr>
+              <a:spcBef>
+                <a:spcPts val="600"/>
+              </a:spcBef>
+              <a:defRPr sz="1100">
                 <a:solidFill>
                   <a:srgbClr val="1E293B"/>
                 </a:solidFill>
               </a:defRPr>
             </a:pPr>
             <a:r>
-              <a:t>Migrasi Mobile Investigator -&gt; Temukan R103 ready -&gt; Proposal -&gt; Persetujuan Tamu -&gt; Selesai Digital.</a:t>
+              <a:t>Verifikasi SHA-256 hash, jaminan single-instance active, serta mekanisme restore/rollback jika transit gagal.</a:t>
             </a:r>
           </a:p>
         </p:txBody>
@@ -7428,8 +7653,8 @@
         </p:nvSpPr>
         <p:spPr>
           <a:xfrm>
-            <a:off x="4389120" y="1645920"/>
-            <a:ext cx="3383280" cy="1280160"/>
+            <a:off x="6126480" y="1645920"/>
+            <a:ext cx="5120640" cy="2103120"/>
           </a:xfrm>
           <a:prstGeom prst="roundRect">
             <a:avLst/>
@@ -7473,8 +7698,8 @@
         </p:nvSpPr>
         <p:spPr>
           <a:xfrm>
-            <a:off x="4526280" y="1737360"/>
-            <a:ext cx="3108960" cy="1097280"/>
+            <a:off x="6309360" y="1783080"/>
+            <a:ext cx="4754880" cy="1828800"/>
           </a:xfrm>
           <a:prstGeom prst="rect">
             <a:avLst/>
@@ -7488,14 +7713,14 @@
           <a:lstStyle/>
           <a:p>
             <a:pPr>
-              <a:defRPr sz="1200" b="1">
-                <a:solidFill>
-                  <a:srgbClr val="FF6B35"/>
-                </a:solidFill>
-              </a:defRPr>
-            </a:pPr>
-            <a:r>
-              <a:t>S02: AC Rusak — Minta Upgrade</a:t>
+              <a:defRPr sz="1500" b="1">
+                <a:solidFill>
+                  <a:srgbClr val="182235"/>
+                </a:solidFill>
+              </a:defRPr>
+            </a:pPr>
+            <a:r>
+              <a:t>Policy Guardrail vs ML</a:t>
             </a:r>
           </a:p>
           <a:p>
@@ -7503,14 +7728,29 @@
               <a:spcBef>
                 <a:spcPts val="300"/>
               </a:spcBef>
-              <a:defRPr sz="1000">
+              <a:defRPr sz="1100" b="1">
+                <a:solidFill>
+                  <a:srgbClr val="10B981"/>
+                </a:solidFill>
+              </a:defRPr>
+            </a:pPr>
+            <a:r>
+              <a:t>Status: 100% Lulus</a:t>
+            </a:r>
+          </a:p>
+          <a:p>
+            <a:pPr>
+              <a:spcBef>
+                <a:spcPts val="600"/>
+              </a:spcBef>
+              <a:defRPr sz="1100">
                 <a:solidFill>
                   <a:srgbClr val="1E293B"/>
                 </a:solidFill>
               </a:defRPr>
             </a:pPr>
             <a:r>
-              <a:t>Kamar setara habis. Bukti terkumpul, namun dialihkan ke staf karena aturan wajib eskalasi upgrade.</a:t>
+              <a:t>Model Logistic Regression mengklasifikasikan risiko komplain; Aturan Kebijakan Bisnis selalu mengesampingkan ML jika terjadi sengketa.</a:t>
             </a:r>
           </a:p>
         </p:txBody>
@@ -7523,8 +7763,8 @@
         </p:nvSpPr>
         <p:spPr>
           <a:xfrm>
-            <a:off x="8046720" y="1645920"/>
-            <a:ext cx="3383280" cy="1280160"/>
+            <a:off x="731520" y="3931920"/>
+            <a:ext cx="5120640" cy="2103120"/>
           </a:xfrm>
           <a:prstGeom prst="roundRect">
             <a:avLst/>
@@ -7568,8 +7808,8 @@
         </p:nvSpPr>
         <p:spPr>
           <a:xfrm>
-            <a:off x="8183880" y="1737360"/>
-            <a:ext cx="3108960" cy="1097280"/>
+            <a:off x="914400" y="4069080"/>
+            <a:ext cx="4754880" cy="1828800"/>
           </a:xfrm>
           <a:prstGeom prst="rect">
             <a:avLst/>
@@ -7583,14 +7823,14 @@
           <a:lstStyle/>
           <a:p>
             <a:pPr>
-              <a:defRPr sz="1200" b="1">
-                <a:solidFill>
-                  <a:srgbClr val="FF6B35"/>
-                </a:solidFill>
-              </a:defRPr>
-            </a:pPr>
-            <a:r>
-              <a:t>S03: Sengketa Tagihan Minibar</a:t>
+              <a:defRPr sz="1500" b="1">
+                <a:solidFill>
+                  <a:srgbClr val="182235"/>
+                </a:solidFill>
+              </a:defRPr>
+            </a:pPr>
+            <a:r>
+              <a:t>Konsistensi Transaksi DB</a:t>
             </a:r>
           </a:p>
           <a:p>
@@ -7598,14 +7838,29 @@
               <a:spcBef>
                 <a:spcPts val="300"/>
               </a:spcBef>
-              <a:defRPr sz="1000">
+              <a:defRPr sz="1100" b="1">
+                <a:solidFill>
+                  <a:srgbClr val="10B981"/>
+                </a:solidFill>
+              </a:defRPr>
+            </a:pPr>
+            <a:r>
+              <a:t>Status: 100% Lulus</a:t>
+            </a:r>
+          </a:p>
+          <a:p>
+            <a:pPr>
+              <a:spcBef>
+                <a:spcPts val="600"/>
+              </a:spcBef>
+              <a:defRPr sz="1100">
                 <a:solidFill>
                   <a:srgbClr val="1E293B"/>
                 </a:solidFill>
               </a:defRPr>
             </a:pPr>
             <a:r>
-              <a:t>Tamu menolak tagihan F02. Kebijakan finansial wajib eskalasi staf (WAITING_HUMAN).</a:t>
+              <a:t>Dua database SQLite in-memory terisolasi; mutasi kamar bersifat atomik dan aman dari konflik konkurensi.</a:t>
             </a:r>
           </a:p>
         </p:txBody>
@@ -7618,8 +7873,8 @@
         </p:nvSpPr>
         <p:spPr>
           <a:xfrm>
-            <a:off x="731520" y="3108960"/>
-            <a:ext cx="3383280" cy="1280160"/>
+            <a:off x="6126480" y="3931920"/>
+            <a:ext cx="5120640" cy="2103120"/>
           </a:xfrm>
           <a:prstGeom prst="roundRect">
             <a:avLst/>
@@ -7663,8 +7918,8 @@
         </p:nvSpPr>
         <p:spPr>
           <a:xfrm>
-            <a:off x="868680" y="3200400"/>
-            <a:ext cx="3108960" cy="1097280"/>
+            <a:off x="6309360" y="4069080"/>
+            <a:ext cx="4754880" cy="1828800"/>
           </a:xfrm>
           <a:prstGeom prst="rect">
             <a:avLst/>
@@ -7678,14 +7933,14 @@
           <a:lstStyle/>
           <a:p>
             <a:pPr>
-              <a:defRPr sz="1200" b="1">
-                <a:solidFill>
-                  <a:srgbClr val="FF6B35"/>
-                </a:solidFill>
-              </a:defRPr>
-            </a:pPr>
-            <a:r>
-              <a:t>S04: Tanya Jam Check-In</a:t>
+              <a:defRPr sz="1500" b="1">
+                <a:solidFill>
+                  <a:srgbClr val="182235"/>
+                </a:solidFill>
+              </a:defRPr>
+            </a:pPr>
+            <a:r>
+              <a:t>Automated Test Suite (pytest)</a:t>
             </a:r>
           </a:p>
           <a:p>
@@ -7693,489 +7948,29 @@
               <a:spcBef>
                 <a:spcPts val="300"/>
               </a:spcBef>
-              <a:defRPr sz="1000">
+              <a:defRPr sz="1100" b="1">
+                <a:solidFill>
+                  <a:srgbClr val="10B981"/>
+                </a:solidFill>
+              </a:defRPr>
+            </a:pPr>
+            <a:r>
+              <a:t>Status: 68 / 68 Passed</a:t>
+            </a:r>
+          </a:p>
+          <a:p>
+            <a:pPr>
+              <a:spcBef>
+                <a:spcPts val="600"/>
+              </a:spcBef>
+              <a:defRPr sz="1100">
                 <a:solidFill>
                   <a:srgbClr val="1E293B"/>
                 </a:solidFill>
               </a:defRPr>
             </a:pPr>
             <a:r>
-              <a:t>Pertanyaan jam operasional. Dijawab instan oleh Concierge Agent dari FAQ lokal (14.00).</a:t>
-            </a:r>
-          </a:p>
-        </p:txBody>
-      </p:sp>
-      <p:sp>
-        <p:nvSpPr>
-          <p:cNvPr id="13" name="Rounded Rectangle 12"/>
-          <p:cNvSpPr/>
-          <p:nvPr/>
-        </p:nvSpPr>
-        <p:spPr>
-          <a:xfrm>
-            <a:off x="4389120" y="3108960"/>
-            <a:ext cx="3383280" cy="1280160"/>
-          </a:xfrm>
-          <a:prstGeom prst="roundRect">
-            <a:avLst/>
-          </a:prstGeom>
-          <a:solidFill>
-            <a:srgbClr val="FFFFFF"/>
-          </a:solidFill>
-          <a:ln w="19050">
-            <a:solidFill>
-              <a:srgbClr val="E2E8F0"/>
-            </a:solidFill>
-          </a:ln>
-        </p:spPr>
-        <p:style>
-          <a:lnRef idx="1">
-            <a:schemeClr val="accent1"/>
-          </a:lnRef>
-          <a:fillRef idx="3">
-            <a:schemeClr val="accent1"/>
-          </a:fillRef>
-          <a:effectRef idx="2">
-            <a:schemeClr val="accent1"/>
-          </a:effectRef>
-          <a:fontRef idx="minor">
-            <a:schemeClr val="lt1"/>
-          </a:fontRef>
-        </p:style>
-        <p:txBody>
-          <a:bodyPr rtlCol="0" anchor="ctr"/>
-          <a:lstStyle/>
-          <a:p>
-            <a:pPr algn="ctr"/>
-          </a:p>
-        </p:txBody>
-      </p:sp>
-      <p:sp>
-        <p:nvSpPr>
-          <p:cNvPr id="14" name="TextBox 13"/>
-          <p:cNvSpPr txBox="1"/>
-          <p:nvPr/>
-        </p:nvSpPr>
-        <p:spPr>
-          <a:xfrm>
-            <a:off x="4526280" y="3200400"/>
-            <a:ext cx="3108960" cy="1097280"/>
-          </a:xfrm>
-          <a:prstGeom prst="rect">
-            <a:avLst/>
-          </a:prstGeom>
-          <a:noFill/>
-        </p:spPr>
-        <p:txBody>
-          <a:bodyPr wrap="square">
-            <a:spAutoFit/>
-          </a:bodyPr>
-          <a:lstStyle/>
-          <a:p>
-            <a:pPr>
-              <a:defRPr sz="1200" b="1">
-                <a:solidFill>
-                  <a:srgbClr val="FF6B35"/>
-                </a:solidFill>
-              </a:defRPr>
-            </a:pPr>
-            <a:r>
-              <a:t>S05: Permintaan Handuk</a:t>
-            </a:r>
-          </a:p>
-          <a:p>
-            <a:pPr>
-              <a:spcBef>
-                <a:spcPts val="300"/>
-              </a:spcBef>
-              <a:defRPr sz="1000">
-                <a:solidFill>
-                  <a:srgbClr val="1E293B"/>
-                </a:solidFill>
-              </a:defRPr>
-            </a:pPr>
-            <a:r>
-              <a:t>Layanan kamar. Tiket Housekeeping dibuat otomatis (PENDING -&gt; IN_PROGRESS -&gt; DONE).</a:t>
-            </a:r>
-          </a:p>
-        </p:txBody>
-      </p:sp>
-      <p:sp>
-        <p:nvSpPr>
-          <p:cNvPr id="15" name="Rounded Rectangle 14"/>
-          <p:cNvSpPr/>
-          <p:nvPr/>
-        </p:nvSpPr>
-        <p:spPr>
-          <a:xfrm>
-            <a:off x="8046720" y="3108960"/>
-            <a:ext cx="3383280" cy="1280160"/>
-          </a:xfrm>
-          <a:prstGeom prst="roundRect">
-            <a:avLst/>
-          </a:prstGeom>
-          <a:solidFill>
-            <a:srgbClr val="FFFFFF"/>
-          </a:solidFill>
-          <a:ln w="19050">
-            <a:solidFill>
-              <a:srgbClr val="E2E8F0"/>
-            </a:solidFill>
-          </a:ln>
-        </p:spPr>
-        <p:style>
-          <a:lnRef idx="1">
-            <a:schemeClr val="accent1"/>
-          </a:lnRef>
-          <a:fillRef idx="3">
-            <a:schemeClr val="accent1"/>
-          </a:fillRef>
-          <a:effectRef idx="2">
-            <a:schemeClr val="accent1"/>
-          </a:effectRef>
-          <a:fontRef idx="minor">
-            <a:schemeClr val="lt1"/>
-          </a:fontRef>
-        </p:style>
-        <p:txBody>
-          <a:bodyPr rtlCol="0" anchor="ctr"/>
-          <a:lstStyle/>
-          <a:p>
-            <a:pPr algn="ctr"/>
-          </a:p>
-        </p:txBody>
-      </p:sp>
-      <p:sp>
-        <p:nvSpPr>
-          <p:cNvPr id="16" name="TextBox 15"/>
-          <p:cNvSpPr txBox="1"/>
-          <p:nvPr/>
-        </p:nvSpPr>
-        <p:spPr>
-          <a:xfrm>
-            <a:off x="8183880" y="3200400"/>
-            <a:ext cx="3108960" cy="1097280"/>
-          </a:xfrm>
-          <a:prstGeom prst="rect">
-            <a:avLst/>
-          </a:prstGeom>
-          <a:noFill/>
-        </p:spPr>
-        <p:txBody>
-          <a:bodyPr wrap="square">
-            <a:spAutoFit/>
-          </a:bodyPr>
-          <a:lstStyle/>
-          <a:p>
-            <a:pPr>
-              <a:defRPr sz="1200" b="1">
-                <a:solidFill>
-                  <a:srgbClr val="FF6B35"/>
-                </a:solidFill>
-              </a:defRPr>
-            </a:pPr>
-            <a:r>
-              <a:t>S06: Rincian Tagihan</a:t>
-            </a:r>
-          </a:p>
-          <a:p>
-            <a:pPr>
-              <a:spcBef>
-                <a:spcPts val="300"/>
-              </a:spcBef>
-              <a:defRPr sz="1000">
-                <a:solidFill>
-                  <a:srgbClr val="1E293B"/>
-                </a:solidFill>
-              </a:defRPr>
-            </a:pPr>
-            <a:r>
-              <a:t>Menampilkan folio tagihan terperinci (Total Rp650.000) tanpa perubahan saldo.</a:t>
-            </a:r>
-          </a:p>
-        </p:txBody>
-      </p:sp>
-      <p:sp>
-        <p:nvSpPr>
-          <p:cNvPr id="17" name="Rounded Rectangle 16"/>
-          <p:cNvSpPr/>
-          <p:nvPr/>
-        </p:nvSpPr>
-        <p:spPr>
-          <a:xfrm>
-            <a:off x="731520" y="4572000"/>
-            <a:ext cx="3383280" cy="1280160"/>
-          </a:xfrm>
-          <a:prstGeom prst="roundRect">
-            <a:avLst/>
-          </a:prstGeom>
-          <a:solidFill>
-            <a:srgbClr val="FFFFFF"/>
-          </a:solidFill>
-          <a:ln w="19050">
-            <a:solidFill>
-              <a:srgbClr val="E2E8F0"/>
-            </a:solidFill>
-          </a:ln>
-        </p:spPr>
-        <p:style>
-          <a:lnRef idx="1">
-            <a:schemeClr val="accent1"/>
-          </a:lnRef>
-          <a:fillRef idx="3">
-            <a:schemeClr val="accent1"/>
-          </a:fillRef>
-          <a:effectRef idx="2">
-            <a:schemeClr val="accent1"/>
-          </a:effectRef>
-          <a:fontRef idx="minor">
-            <a:schemeClr val="lt1"/>
-          </a:fontRef>
-        </p:style>
-        <p:txBody>
-          <a:bodyPr rtlCol="0" anchor="ctr"/>
-          <a:lstStyle/>
-          <a:p>
-            <a:pPr algn="ctr"/>
-          </a:p>
-        </p:txBody>
-      </p:sp>
-      <p:sp>
-        <p:nvSpPr>
-          <p:cNvPr id="18" name="TextBox 17"/>
-          <p:cNvSpPr txBox="1"/>
-          <p:nvPr/>
-        </p:nvSpPr>
-        <p:spPr>
-          <a:xfrm>
-            <a:off x="868680" y="4663440"/>
-            <a:ext cx="3108960" cy="1097280"/>
-          </a:xfrm>
-          <a:prstGeom prst="rect">
-            <a:avLst/>
-          </a:prstGeom>
-          <a:noFill/>
-        </p:spPr>
-        <p:txBody>
-          <a:bodyPr wrap="square">
-            <a:spAutoFit/>
-          </a:bodyPr>
-          <a:lstStyle/>
-          <a:p>
-            <a:pPr>
-              <a:defRPr sz="1200" b="1">
-                <a:solidFill>
-                  <a:srgbClr val="FF6B35"/>
-                </a:solidFill>
-              </a:defRPr>
-            </a:pPr>
-            <a:r>
-              <a:t>S07: Jam Check-Out &amp; Late</a:t>
-            </a:r>
-          </a:p>
-          <a:p>
-            <a:pPr>
-              <a:spcBef>
-                <a:spcPts val="300"/>
-              </a:spcBef>
-              <a:defRPr sz="1000">
-                <a:solidFill>
-                  <a:srgbClr val="1E293B"/>
-                </a:solidFill>
-              </a:defRPr>
-            </a:pPr>
-            <a:r>
-              <a:t>Informasi check-out maksimal 12.00 WIB dan alur permohonan late check-out.</a:t>
-            </a:r>
-          </a:p>
-        </p:txBody>
-      </p:sp>
-      <p:sp>
-        <p:nvSpPr>
-          <p:cNvPr id="19" name="Rounded Rectangle 18"/>
-          <p:cNvSpPr/>
-          <p:nvPr/>
-        </p:nvSpPr>
-        <p:spPr>
-          <a:xfrm>
-            <a:off x="4389120" y="4572000"/>
-            <a:ext cx="3383280" cy="1280160"/>
-          </a:xfrm>
-          <a:prstGeom prst="roundRect">
-            <a:avLst/>
-          </a:prstGeom>
-          <a:solidFill>
-            <a:srgbClr val="FFFFFF"/>
-          </a:solidFill>
-          <a:ln w="19050">
-            <a:solidFill>
-              <a:srgbClr val="E2E8F0"/>
-            </a:solidFill>
-          </a:ln>
-        </p:spPr>
-        <p:style>
-          <a:lnRef idx="1">
-            <a:schemeClr val="accent1"/>
-          </a:lnRef>
-          <a:fillRef idx="3">
-            <a:schemeClr val="accent1"/>
-          </a:fillRef>
-          <a:effectRef idx="2">
-            <a:schemeClr val="accent1"/>
-          </a:effectRef>
-          <a:fontRef idx="minor">
-            <a:schemeClr val="lt1"/>
-          </a:fontRef>
-        </p:style>
-        <p:txBody>
-          <a:bodyPr rtlCol="0" anchor="ctr"/>
-          <a:lstStyle/>
-          <a:p>
-            <a:pPr algn="ctr"/>
-          </a:p>
-        </p:txBody>
-      </p:sp>
-      <p:sp>
-        <p:nvSpPr>
-          <p:cNvPr id="20" name="TextBox 19"/>
-          <p:cNvSpPr txBox="1"/>
-          <p:nvPr/>
-        </p:nvSpPr>
-        <p:spPr>
-          <a:xfrm>
-            <a:off x="4526280" y="4663440"/>
-            <a:ext cx="3108960" cy="1097280"/>
-          </a:xfrm>
-          <a:prstGeom prst="rect">
-            <a:avLst/>
-          </a:prstGeom>
-          <a:noFill/>
-        </p:spPr>
-        <p:txBody>
-          <a:bodyPr wrap="square">
-            <a:spAutoFit/>
-          </a:bodyPr>
-          <a:lstStyle/>
-          <a:p>
-            <a:pPr>
-              <a:defRPr sz="1200" b="1">
-                <a:solidFill>
-                  <a:srgbClr val="FF6B35"/>
-                </a:solidFill>
-              </a:defRPr>
-            </a:pPr>
-            <a:r>
-              <a:t>S08: Permintaan Bantal Tambahan</a:t>
-            </a:r>
-          </a:p>
-          <a:p>
-            <a:pPr>
-              <a:spcBef>
-                <a:spcPts val="300"/>
-              </a:spcBef>
-              <a:defRPr sz="1000">
-                <a:solidFill>
-                  <a:srgbClr val="1E293B"/>
-                </a:solidFill>
-              </a:defRPr>
-            </a:pPr>
-            <a:r>
-              <a:t>Housekeeping membuat work order antar bantal tambahan ke kamar tamu.</a:t>
-            </a:r>
-          </a:p>
-        </p:txBody>
-      </p:sp>
-      <p:sp>
-        <p:nvSpPr>
-          <p:cNvPr id="21" name="Rounded Rectangle 20"/>
-          <p:cNvSpPr/>
-          <p:nvPr/>
-        </p:nvSpPr>
-        <p:spPr>
-          <a:xfrm>
-            <a:off x="8046720" y="4572000"/>
-            <a:ext cx="3383280" cy="1280160"/>
-          </a:xfrm>
-          <a:prstGeom prst="roundRect">
-            <a:avLst/>
-          </a:prstGeom>
-          <a:solidFill>
-            <a:srgbClr val="FFFFFF"/>
-          </a:solidFill>
-          <a:ln w="19050">
-            <a:solidFill>
-              <a:srgbClr val="E2E8F0"/>
-            </a:solidFill>
-          </a:ln>
-        </p:spPr>
-        <p:style>
-          <a:lnRef idx="1">
-            <a:schemeClr val="accent1"/>
-          </a:lnRef>
-          <a:fillRef idx="3">
-            <a:schemeClr val="accent1"/>
-          </a:fillRef>
-          <a:effectRef idx="2">
-            <a:schemeClr val="accent1"/>
-          </a:effectRef>
-          <a:fontRef idx="minor">
-            <a:schemeClr val="lt1"/>
-          </a:fontRef>
-        </p:style>
-        <p:txBody>
-          <a:bodyPr rtlCol="0" anchor="ctr"/>
-          <a:lstStyle/>
-          <a:p>
-            <a:pPr algn="ctr"/>
-          </a:p>
-        </p:txBody>
-      </p:sp>
-      <p:sp>
-        <p:nvSpPr>
-          <p:cNvPr id="22" name="TextBox 21"/>
-          <p:cNvSpPr txBox="1"/>
-          <p:nvPr/>
-        </p:nvSpPr>
-        <p:spPr>
-          <a:xfrm>
-            <a:off x="8183880" y="4663440"/>
-            <a:ext cx="3108960" cy="1097280"/>
-          </a:xfrm>
-          <a:prstGeom prst="rect">
-            <a:avLst/>
-          </a:prstGeom>
-          <a:noFill/>
-        </p:spPr>
-        <p:txBody>
-          <a:bodyPr wrap="square">
-            <a:spAutoFit/>
-          </a:bodyPr>
-          <a:lstStyle/>
-          <a:p>
-            <a:pPr>
-              <a:defRPr sz="1200" b="1">
-                <a:solidFill>
-                  <a:srgbClr val="FF6B35"/>
-                </a:solidFill>
-              </a:defRPr>
-            </a:pPr>
-            <a:r>
-              <a:t>S09: Informasi Wi-Fi Hotel</a:t>
-            </a:r>
-          </a:p>
-          <a:p>
-            <a:pPr>
-              <a:spcBef>
-                <a:spcPts val="300"/>
-              </a:spcBef>
-              <a:defRPr sz="1000">
-                <a:solidFill>
-                  <a:srgbClr val="1E293B"/>
-                </a:solidFill>
-              </a:defRPr>
-            </a:pPr>
-            <a:r>
-              <a:t>Concierge menjawab detail SSID HotelNusantara_Guest tanpa kata sandi.</a:t>
+              <a:t>Seluruh 68 automated unit &amp; integration tests selesai dalam waktu 3.3 detik secara deterministik dan offline.</a:t>
             </a:r>
           </a:p>
         </p:txBody>
